--- a/Lesmateriaal/Slides/CySec – les 5 - Netwerken en spysoftware.pptx
+++ b/Lesmateriaal/Slides/CySec – les 5 - Netwerken en spysoftware.pptx
@@ -5,27 +5,25 @@
     <p:sldMasterId id="2147483648" r:id="rId1"/>
   </p:sldMasterIdLst>
   <p:notesMasterIdLst>
-    <p:notesMasterId r:id="rId20"/>
+    <p:notesMasterId r:id="rId18"/>
   </p:notesMasterIdLst>
   <p:sldIdLst>
     <p:sldId id="256" r:id="rId2"/>
     <p:sldId id="257" r:id="rId3"/>
-    <p:sldId id="258" r:id="rId4"/>
-    <p:sldId id="259" r:id="rId5"/>
-    <p:sldId id="260" r:id="rId6"/>
-    <p:sldId id="270" r:id="rId7"/>
-    <p:sldId id="268" r:id="rId8"/>
-    <p:sldId id="265" r:id="rId9"/>
-    <p:sldId id="269" r:id="rId10"/>
-    <p:sldId id="261" r:id="rId11"/>
-    <p:sldId id="273" r:id="rId12"/>
-    <p:sldId id="264" r:id="rId13"/>
-    <p:sldId id="262" r:id="rId14"/>
-    <p:sldId id="263" r:id="rId15"/>
-    <p:sldId id="271" r:id="rId16"/>
-    <p:sldId id="272" r:id="rId17"/>
-    <p:sldId id="266" r:id="rId18"/>
-    <p:sldId id="267" r:id="rId19"/>
+    <p:sldId id="259" r:id="rId4"/>
+    <p:sldId id="260" r:id="rId5"/>
+    <p:sldId id="268" r:id="rId6"/>
+    <p:sldId id="265" r:id="rId7"/>
+    <p:sldId id="269" r:id="rId8"/>
+    <p:sldId id="261" r:id="rId9"/>
+    <p:sldId id="273" r:id="rId10"/>
+    <p:sldId id="264" r:id="rId11"/>
+    <p:sldId id="262" r:id="rId12"/>
+    <p:sldId id="263" r:id="rId13"/>
+    <p:sldId id="271" r:id="rId14"/>
+    <p:sldId id="272" r:id="rId15"/>
+    <p:sldId id="266" r:id="rId16"/>
+    <p:sldId id="267" r:id="rId17"/>
   </p:sldIdLst>
   <p:sldSz cx="12192000" cy="6858000"/>
   <p:notesSz cx="6858000" cy="9144000"/>
@@ -217,7 +215,7 @@
           <a:p>
             <a:fld id="{F958DB6F-D407-4DAD-8E07-F71A85896F6E}" type="datetimeFigureOut">
               <a:rPr lang="nl-NL" smtClean="0"/>
-              <a:t>18-2-2026</a:t>
+              <a:t>7-3-2026</a:t>
             </a:fld>
             <a:endParaRPr lang="nl-NL"/>
           </a:p>
@@ -636,7 +634,7 @@
           <a:p>
             <a:fld id="{6D18414D-5A9A-49A8-AA48-E9E7CADEA260}" type="datetimeFigureOut">
               <a:rPr lang="nl-NL" smtClean="0"/>
-              <a:t>18-2-2026</a:t>
+              <a:t>7-3-2026</a:t>
             </a:fld>
             <a:endParaRPr lang="nl-NL"/>
           </a:p>
@@ -844,7 +842,7 @@
           <a:p>
             <a:fld id="{6D18414D-5A9A-49A8-AA48-E9E7CADEA260}" type="datetimeFigureOut">
               <a:rPr lang="nl-NL" smtClean="0"/>
-              <a:t>18-2-2026</a:t>
+              <a:t>7-3-2026</a:t>
             </a:fld>
             <a:endParaRPr lang="nl-NL"/>
           </a:p>
@@ -1053,7 +1051,7 @@
           <a:p>
             <a:fld id="{6D18414D-5A9A-49A8-AA48-E9E7CADEA260}" type="datetimeFigureOut">
               <a:rPr lang="nl-NL" smtClean="0"/>
-              <a:t>18-2-2026</a:t>
+              <a:t>7-3-2026</a:t>
             </a:fld>
             <a:endParaRPr lang="nl-NL"/>
           </a:p>
@@ -1251,7 +1249,7 @@
           <a:p>
             <a:fld id="{6D18414D-5A9A-49A8-AA48-E9E7CADEA260}" type="datetimeFigureOut">
               <a:rPr lang="nl-NL" smtClean="0"/>
-              <a:t>18-2-2026</a:t>
+              <a:t>7-3-2026</a:t>
             </a:fld>
             <a:endParaRPr lang="nl-NL"/>
           </a:p>
@@ -1526,7 +1524,7 @@
           <a:p>
             <a:fld id="{6D18414D-5A9A-49A8-AA48-E9E7CADEA260}" type="datetimeFigureOut">
               <a:rPr lang="nl-NL" smtClean="0"/>
-              <a:t>18-2-2026</a:t>
+              <a:t>7-3-2026</a:t>
             </a:fld>
             <a:endParaRPr lang="nl-NL"/>
           </a:p>
@@ -1791,7 +1789,7 @@
           <a:p>
             <a:fld id="{6D18414D-5A9A-49A8-AA48-E9E7CADEA260}" type="datetimeFigureOut">
               <a:rPr lang="nl-NL" smtClean="0"/>
-              <a:t>18-2-2026</a:t>
+              <a:t>7-3-2026</a:t>
             </a:fld>
             <a:endParaRPr lang="nl-NL"/>
           </a:p>
@@ -2204,7 +2202,7 @@
           <a:p>
             <a:fld id="{6D18414D-5A9A-49A8-AA48-E9E7CADEA260}" type="datetimeFigureOut">
               <a:rPr lang="nl-NL" smtClean="0"/>
-              <a:t>18-2-2026</a:t>
+              <a:t>7-3-2026</a:t>
             </a:fld>
             <a:endParaRPr lang="nl-NL"/>
           </a:p>
@@ -2345,7 +2343,7 @@
           <a:p>
             <a:fld id="{6D18414D-5A9A-49A8-AA48-E9E7CADEA260}" type="datetimeFigureOut">
               <a:rPr lang="nl-NL" smtClean="0"/>
-              <a:t>18-2-2026</a:t>
+              <a:t>7-3-2026</a:t>
             </a:fld>
             <a:endParaRPr lang="nl-NL"/>
           </a:p>
@@ -2458,7 +2456,7 @@
           <a:p>
             <a:fld id="{6D18414D-5A9A-49A8-AA48-E9E7CADEA260}" type="datetimeFigureOut">
               <a:rPr lang="nl-NL" smtClean="0"/>
-              <a:t>18-2-2026</a:t>
+              <a:t>7-3-2026</a:t>
             </a:fld>
             <a:endParaRPr lang="nl-NL"/>
           </a:p>
@@ -2769,7 +2767,7 @@
           <a:p>
             <a:fld id="{6D18414D-5A9A-49A8-AA48-E9E7CADEA260}" type="datetimeFigureOut">
               <a:rPr lang="nl-NL" smtClean="0"/>
-              <a:t>18-2-2026</a:t>
+              <a:t>7-3-2026</a:t>
             </a:fld>
             <a:endParaRPr lang="nl-NL"/>
           </a:p>
@@ -3060,7 +3058,7 @@
           <a:p>
             <a:fld id="{6D18414D-5A9A-49A8-AA48-E9E7CADEA260}" type="datetimeFigureOut">
               <a:rPr lang="nl-NL" smtClean="0"/>
-              <a:t>18-2-2026</a:t>
+              <a:t>7-3-2026</a:t>
             </a:fld>
             <a:endParaRPr lang="nl-NL"/>
           </a:p>
@@ -3252,7 +3250,7 @@
           <a:p>
             <a:fld id="{6D18414D-5A9A-49A8-AA48-E9E7CADEA260}" type="datetimeFigureOut">
               <a:rPr lang="nl-NL" smtClean="0"/>
-              <a:t>18-2-2026</a:t>
+              <a:t>7-3-2026</a:t>
             </a:fld>
             <a:endParaRPr lang="nl-NL" dirty="0"/>
           </a:p>
@@ -4165,6 +4163,2105 @@
 </file>
 
 <file path=ppt/slides/slide10.xml><?xml version="1.0" encoding="utf-8"?>
+<p:sld xmlns:a="http://schemas.openxmlformats.org/drawingml/2006/main" xmlns:r="http://schemas.openxmlformats.org/officeDocument/2006/relationships" xmlns:p="http://schemas.openxmlformats.org/presentationml/2006/main">
+  <p:cSld>
+    <p:spTree>
+      <p:nvGrpSpPr>
+        <p:cNvPr id="1" name=""/>
+        <p:cNvGrpSpPr/>
+        <p:nvPr/>
+      </p:nvGrpSpPr>
+      <p:grpSpPr>
+        <a:xfrm>
+          <a:off x="0" y="0"/>
+          <a:ext cx="0" cy="0"/>
+          <a:chOff x="0" y="0"/>
+          <a:chExt cx="0" cy="0"/>
+        </a:xfrm>
+      </p:grpSpPr>
+      <p:sp>
+        <p:nvSpPr>
+          <p:cNvPr id="2" name="Titel 1">
+            <a:extLst>
+              <a:ext uri="{FF2B5EF4-FFF2-40B4-BE49-F238E27FC236}">
+                <a16:creationId xmlns:a16="http://schemas.microsoft.com/office/drawing/2014/main" id="{270D8AC7-F844-E434-22D7-47EB46662A62}"/>
+              </a:ext>
+            </a:extLst>
+          </p:cNvPr>
+          <p:cNvSpPr>
+            <a:spLocks noGrp="1"/>
+          </p:cNvSpPr>
+          <p:nvPr>
+            <p:ph type="title"/>
+          </p:nvPr>
+        </p:nvSpPr>
+        <p:spPr/>
+        <p:txBody>
+          <a:bodyPr/>
+          <a:lstStyle/>
+          <a:p>
+            <a:r>
+              <a:rPr lang="nl-NL" dirty="0"/>
+              <a:t>Netwerk beveiliging - invalshoeken</a:t>
+            </a:r>
+          </a:p>
+        </p:txBody>
+      </p:sp>
+      <p:sp>
+        <p:nvSpPr>
+          <p:cNvPr id="3" name="Tijdelijke aanduiding voor inhoud 2">
+            <a:extLst>
+              <a:ext uri="{FF2B5EF4-FFF2-40B4-BE49-F238E27FC236}">
+                <a16:creationId xmlns:a16="http://schemas.microsoft.com/office/drawing/2014/main" id="{EFA93119-D33B-E206-5C87-0A2420A030FD}"/>
+              </a:ext>
+            </a:extLst>
+          </p:cNvPr>
+          <p:cNvSpPr>
+            <a:spLocks noGrp="1"/>
+          </p:cNvSpPr>
+          <p:nvPr>
+            <p:ph idx="1"/>
+          </p:nvPr>
+        </p:nvSpPr>
+        <p:spPr/>
+        <p:txBody>
+          <a:bodyPr/>
+          <a:lstStyle/>
+          <a:p>
+            <a:r>
+              <a:rPr lang="nl-NL" dirty="0"/>
+              <a:t>Voorkom connectie</a:t>
+            </a:r>
+          </a:p>
+          <a:p>
+            <a:r>
+              <a:rPr lang="nl-NL" dirty="0"/>
+              <a:t>Voorkom toegang</a:t>
+            </a:r>
+          </a:p>
+          <a:p>
+            <a:r>
+              <a:rPr lang="nl-NL" dirty="0"/>
+              <a:t>Voorkom </a:t>
+            </a:r>
+            <a:r>
+              <a:rPr lang="nl-NL" dirty="0" err="1"/>
+              <a:t>ongeauthorizeerde</a:t>
+            </a:r>
+            <a:r>
+              <a:rPr lang="nl-NL" dirty="0"/>
+              <a:t> data</a:t>
+            </a:r>
+          </a:p>
+          <a:p>
+            <a:r>
+              <a:rPr lang="nl-NL" dirty="0"/>
+              <a:t>Voorkom data extractie</a:t>
+            </a:r>
+          </a:p>
+          <a:p>
+            <a:endParaRPr lang="nl-NL" dirty="0"/>
+          </a:p>
+        </p:txBody>
+      </p:sp>
+    </p:spTree>
+    <p:extLst>
+      <p:ext uri="{BB962C8B-B14F-4D97-AF65-F5344CB8AC3E}">
+        <p14:creationId xmlns:p14="http://schemas.microsoft.com/office/powerpoint/2010/main" val="2327852966"/>
+      </p:ext>
+    </p:extLst>
+  </p:cSld>
+  <p:clrMapOvr>
+    <a:masterClrMapping/>
+  </p:clrMapOvr>
+</p:sld>
+</file>
+
+<file path=ppt/slides/slide11.xml><?xml version="1.0" encoding="utf-8"?>
+<p:sld xmlns:a="http://schemas.openxmlformats.org/drawingml/2006/main" xmlns:r="http://schemas.openxmlformats.org/officeDocument/2006/relationships" xmlns:p="http://schemas.openxmlformats.org/presentationml/2006/main">
+  <p:cSld>
+    <p:spTree>
+      <p:nvGrpSpPr>
+        <p:cNvPr id="1" name=""/>
+        <p:cNvGrpSpPr/>
+        <p:nvPr/>
+      </p:nvGrpSpPr>
+      <p:grpSpPr>
+        <a:xfrm>
+          <a:off x="0" y="0"/>
+          <a:ext cx="0" cy="0"/>
+          <a:chOff x="0" y="0"/>
+          <a:chExt cx="0" cy="0"/>
+        </a:xfrm>
+      </p:grpSpPr>
+      <p:sp>
+        <p:nvSpPr>
+          <p:cNvPr id="2" name="Titel 1">
+            <a:extLst>
+              <a:ext uri="{FF2B5EF4-FFF2-40B4-BE49-F238E27FC236}">
+                <a16:creationId xmlns:a16="http://schemas.microsoft.com/office/drawing/2014/main" id="{F01C623F-8EDD-04A0-7256-DD23FAC9E09B}"/>
+              </a:ext>
+            </a:extLst>
+          </p:cNvPr>
+          <p:cNvSpPr>
+            <a:spLocks noGrp="1"/>
+          </p:cNvSpPr>
+          <p:nvPr>
+            <p:ph type="title"/>
+          </p:nvPr>
+        </p:nvSpPr>
+        <p:spPr/>
+        <p:txBody>
+          <a:bodyPr/>
+          <a:lstStyle/>
+          <a:p>
+            <a:r>
+              <a:rPr lang="nl-NL" dirty="0"/>
+              <a:t>Netwerk beveiliging - thuis</a:t>
+            </a:r>
+          </a:p>
+        </p:txBody>
+      </p:sp>
+      <p:sp>
+        <p:nvSpPr>
+          <p:cNvPr id="3" name="Tijdelijke aanduiding voor inhoud 2">
+            <a:extLst>
+              <a:ext uri="{FF2B5EF4-FFF2-40B4-BE49-F238E27FC236}">
+                <a16:creationId xmlns:a16="http://schemas.microsoft.com/office/drawing/2014/main" id="{2C1571CC-0F7B-F2C6-5EF9-0937627231A9}"/>
+              </a:ext>
+            </a:extLst>
+          </p:cNvPr>
+          <p:cNvSpPr>
+            <a:spLocks noGrp="1"/>
+          </p:cNvSpPr>
+          <p:nvPr>
+            <p:ph idx="1"/>
+          </p:nvPr>
+        </p:nvSpPr>
+        <p:spPr/>
+        <p:txBody>
+          <a:bodyPr>
+            <a:normAutofit fontScale="92500" lnSpcReduction="10000"/>
+          </a:bodyPr>
+          <a:lstStyle/>
+          <a:p>
+            <a:r>
+              <a:rPr lang="nl-NL" dirty="0"/>
+              <a:t>WPA3 versleuteling</a:t>
+            </a:r>
+          </a:p>
+          <a:p>
+            <a:r>
+              <a:rPr lang="nl-NL" dirty="0"/>
+              <a:t>Splitsing tussen privé en gast netwerk</a:t>
+            </a:r>
+          </a:p>
+          <a:p>
+            <a:r>
+              <a:rPr lang="nl-NL" dirty="0"/>
+              <a:t>Beveiligd netwerk zonder publieke fysieke aansluiting</a:t>
+            </a:r>
+          </a:p>
+          <a:p>
+            <a:r>
+              <a:rPr lang="nl-NL" dirty="0"/>
+              <a:t>Firewalls</a:t>
+            </a:r>
+          </a:p>
+          <a:p>
+            <a:r>
+              <a:rPr lang="nl-NL" dirty="0"/>
+              <a:t>VPN</a:t>
+            </a:r>
+          </a:p>
+          <a:p>
+            <a:r>
+              <a:rPr lang="nl-NL" dirty="0"/>
+              <a:t>Sterke geheime wachtwoorden, dit blokkeert 70% van de privé dreigingen</a:t>
+            </a:r>
+          </a:p>
+          <a:p>
+            <a:r>
+              <a:rPr lang="nl-NL" dirty="0"/>
+              <a:t>Formeel verzoek tot verwijdering data geschiedenis bij internet provider</a:t>
+            </a:r>
+            <a:br>
+              <a:rPr lang="nl-NL" dirty="0"/>
+            </a:br>
+            <a:r>
+              <a:rPr lang="nl-NL" b="1" dirty="0"/>
+              <a:t>'recht op vergetelheid'</a:t>
+            </a:r>
+            <a:r>
+              <a:rPr lang="nl-NL" dirty="0"/>
+              <a:t> (artikel 17 AVG)</a:t>
+            </a:r>
+          </a:p>
+        </p:txBody>
+      </p:sp>
+    </p:spTree>
+    <p:extLst>
+      <p:ext uri="{BB962C8B-B14F-4D97-AF65-F5344CB8AC3E}">
+        <p14:creationId xmlns:p14="http://schemas.microsoft.com/office/powerpoint/2010/main" val="4079701516"/>
+      </p:ext>
+    </p:extLst>
+  </p:cSld>
+  <p:clrMapOvr>
+    <a:masterClrMapping/>
+  </p:clrMapOvr>
+</p:sld>
+</file>
+
+<file path=ppt/slides/slide12.xml><?xml version="1.0" encoding="utf-8"?>
+<p:sld xmlns:a="http://schemas.openxmlformats.org/drawingml/2006/main" xmlns:r="http://schemas.openxmlformats.org/officeDocument/2006/relationships" xmlns:p="http://schemas.openxmlformats.org/presentationml/2006/main">
+  <p:cSld>
+    <p:spTree>
+      <p:nvGrpSpPr>
+        <p:cNvPr id="1" name=""/>
+        <p:cNvGrpSpPr/>
+        <p:nvPr/>
+      </p:nvGrpSpPr>
+      <p:grpSpPr>
+        <a:xfrm>
+          <a:off x="0" y="0"/>
+          <a:ext cx="0" cy="0"/>
+          <a:chOff x="0" y="0"/>
+          <a:chExt cx="0" cy="0"/>
+        </a:xfrm>
+      </p:grpSpPr>
+      <p:sp>
+        <p:nvSpPr>
+          <p:cNvPr id="2" name="Titel 1">
+            <a:extLst>
+              <a:ext uri="{FF2B5EF4-FFF2-40B4-BE49-F238E27FC236}">
+                <a16:creationId xmlns:a16="http://schemas.microsoft.com/office/drawing/2014/main" id="{50FCEC88-3D46-F402-7693-C4F510DB402F}"/>
+              </a:ext>
+            </a:extLst>
+          </p:cNvPr>
+          <p:cNvSpPr>
+            <a:spLocks noGrp="1"/>
+          </p:cNvSpPr>
+          <p:nvPr>
+            <p:ph type="title"/>
+          </p:nvPr>
+        </p:nvSpPr>
+        <p:spPr/>
+        <p:txBody>
+          <a:bodyPr/>
+          <a:lstStyle/>
+          <a:p>
+            <a:r>
+              <a:rPr lang="nl-NL" dirty="0" err="1"/>
+              <a:t>Spysoftware</a:t>
+            </a:r>
+            <a:endParaRPr lang="nl-NL" dirty="0"/>
+          </a:p>
+        </p:txBody>
+      </p:sp>
+      <p:sp>
+        <p:nvSpPr>
+          <p:cNvPr id="3" name="Tijdelijke aanduiding voor inhoud 2">
+            <a:extLst>
+              <a:ext uri="{FF2B5EF4-FFF2-40B4-BE49-F238E27FC236}">
+                <a16:creationId xmlns:a16="http://schemas.microsoft.com/office/drawing/2014/main" id="{2826A35B-3FEA-46C1-6448-941478EAA77F}"/>
+              </a:ext>
+            </a:extLst>
+          </p:cNvPr>
+          <p:cNvSpPr>
+            <a:spLocks noGrp="1"/>
+          </p:cNvSpPr>
+          <p:nvPr>
+            <p:ph idx="1"/>
+          </p:nvPr>
+        </p:nvSpPr>
+        <p:spPr/>
+        <p:txBody>
+          <a:bodyPr/>
+          <a:lstStyle/>
+          <a:p>
+            <a:r>
+              <a:rPr lang="nl-NL" dirty="0"/>
+              <a:t>Hackers willen om meerdere redenen </a:t>
+            </a:r>
+            <a:r>
+              <a:rPr lang="nl-NL" dirty="0" err="1"/>
+              <a:t>spysoftware</a:t>
+            </a:r>
+            <a:r>
+              <a:rPr lang="nl-NL" dirty="0"/>
+              <a:t> plaatsen</a:t>
+            </a:r>
+          </a:p>
+          <a:p>
+            <a:pPr lvl="1"/>
+            <a:r>
+              <a:rPr lang="nl-NL" dirty="0"/>
+              <a:t>Chantage (blackmail) van personen of bedrijven</a:t>
+            </a:r>
+          </a:p>
+          <a:p>
+            <a:pPr lvl="1"/>
+            <a:r>
+              <a:rPr lang="nl-NL" dirty="0"/>
+              <a:t>Bedrijfsgeheimen</a:t>
+            </a:r>
+          </a:p>
+          <a:p>
+            <a:pPr lvl="1"/>
+            <a:r>
+              <a:rPr lang="nl-NL" dirty="0"/>
+              <a:t>Zwarte markt voor data</a:t>
+            </a:r>
+          </a:p>
+          <a:p>
+            <a:pPr lvl="1"/>
+            <a:r>
+              <a:rPr lang="nl-NL" dirty="0"/>
+              <a:t>Zwaktes ontdekken voor een zwaardere aanval</a:t>
+            </a:r>
+          </a:p>
+          <a:p>
+            <a:endParaRPr lang="nl-NL" dirty="0"/>
+          </a:p>
+          <a:p>
+            <a:r>
+              <a:rPr lang="nl-NL" dirty="0"/>
+              <a:t>Veel van de bekende </a:t>
+            </a:r>
+            <a:r>
+              <a:rPr lang="nl-NL" dirty="0" err="1"/>
+              <a:t>spysoftware</a:t>
+            </a:r>
+            <a:r>
+              <a:rPr lang="nl-NL" dirty="0"/>
+              <a:t> is makkelijk te herkennen</a:t>
+            </a:r>
+          </a:p>
+          <a:p>
+            <a:pPr lvl="1"/>
+            <a:endParaRPr lang="nl-NL" dirty="0"/>
+          </a:p>
+        </p:txBody>
+      </p:sp>
+    </p:spTree>
+    <p:extLst>
+      <p:ext uri="{BB962C8B-B14F-4D97-AF65-F5344CB8AC3E}">
+        <p14:creationId xmlns:p14="http://schemas.microsoft.com/office/powerpoint/2010/main" val="1756895851"/>
+      </p:ext>
+    </p:extLst>
+  </p:cSld>
+  <p:clrMapOvr>
+    <a:masterClrMapping/>
+  </p:clrMapOvr>
+</p:sld>
+</file>
+
+<file path=ppt/slides/slide13.xml><?xml version="1.0" encoding="utf-8"?>
+<p:sld xmlns:a="http://schemas.openxmlformats.org/drawingml/2006/main" xmlns:r="http://schemas.openxmlformats.org/officeDocument/2006/relationships" xmlns:p="http://schemas.openxmlformats.org/presentationml/2006/main">
+  <p:cSld>
+    <p:spTree>
+      <p:nvGrpSpPr>
+        <p:cNvPr id="1" name=""/>
+        <p:cNvGrpSpPr/>
+        <p:nvPr/>
+      </p:nvGrpSpPr>
+      <p:grpSpPr>
+        <a:xfrm>
+          <a:off x="0" y="0"/>
+          <a:ext cx="0" cy="0"/>
+          <a:chOff x="0" y="0"/>
+          <a:chExt cx="0" cy="0"/>
+        </a:xfrm>
+      </p:grpSpPr>
+      <p:sp>
+        <p:nvSpPr>
+          <p:cNvPr id="2" name="Titel 1">
+            <a:extLst>
+              <a:ext uri="{FF2B5EF4-FFF2-40B4-BE49-F238E27FC236}">
+                <a16:creationId xmlns:a16="http://schemas.microsoft.com/office/drawing/2014/main" id="{FC180BEB-6337-DB82-046D-18E845496FDB}"/>
+              </a:ext>
+            </a:extLst>
+          </p:cNvPr>
+          <p:cNvSpPr>
+            <a:spLocks noGrp="1"/>
+          </p:cNvSpPr>
+          <p:nvPr>
+            <p:ph type="title"/>
+          </p:nvPr>
+        </p:nvSpPr>
+        <p:spPr/>
+        <p:txBody>
+          <a:bodyPr/>
+          <a:lstStyle/>
+          <a:p>
+            <a:r>
+              <a:rPr lang="nl-NL" dirty="0" err="1"/>
+              <a:t>Spysoftware</a:t>
+            </a:r>
+            <a:endParaRPr lang="nl-NL" dirty="0"/>
+          </a:p>
+        </p:txBody>
+      </p:sp>
+      <p:sp>
+        <p:nvSpPr>
+          <p:cNvPr id="3" name="Tijdelijke aanduiding voor inhoud 2">
+            <a:extLst>
+              <a:ext uri="{FF2B5EF4-FFF2-40B4-BE49-F238E27FC236}">
+                <a16:creationId xmlns:a16="http://schemas.microsoft.com/office/drawing/2014/main" id="{6F34CD11-D667-7F30-83A9-740342E96730}"/>
+              </a:ext>
+            </a:extLst>
+          </p:cNvPr>
+          <p:cNvSpPr>
+            <a:spLocks noGrp="1"/>
+          </p:cNvSpPr>
+          <p:nvPr>
+            <p:ph idx="1"/>
+          </p:nvPr>
+        </p:nvSpPr>
+        <p:spPr/>
+        <p:txBody>
+          <a:bodyPr/>
+          <a:lstStyle/>
+          <a:p>
+            <a:r>
+              <a:rPr lang="nl-NL" dirty="0" err="1"/>
+              <a:t>Syptomen</a:t>
+            </a:r>
+            <a:r>
+              <a:rPr lang="nl-NL" dirty="0"/>
+              <a:t> van </a:t>
+            </a:r>
+            <a:r>
+              <a:rPr lang="nl-NL" dirty="0" err="1"/>
+              <a:t>spysoftware</a:t>
+            </a:r>
+            <a:r>
+              <a:rPr lang="nl-NL" dirty="0"/>
+              <a:t>:</a:t>
+            </a:r>
+          </a:p>
+          <a:p>
+            <a:pPr lvl="1"/>
+            <a:r>
+              <a:rPr lang="nl-NL" dirty="0"/>
+              <a:t>Camera’s die aan en uit gaan van apparaten zonder reden</a:t>
+            </a:r>
+          </a:p>
+          <a:p>
+            <a:pPr lvl="1"/>
+            <a:r>
+              <a:rPr lang="nl-NL" dirty="0"/>
+              <a:t>Je computer is ineens verlangzaamd zonder reden</a:t>
+            </a:r>
+          </a:p>
+          <a:p>
+            <a:pPr lvl="1"/>
+            <a:r>
+              <a:rPr lang="nl-NL" dirty="0"/>
+              <a:t>Je computer wordt veel warmer zonder reden</a:t>
+            </a:r>
+          </a:p>
+          <a:p>
+            <a:pPr lvl="1"/>
+            <a:r>
+              <a:rPr lang="nl-NL" dirty="0"/>
+              <a:t>Je muis beweegt zonder dat er input is (Dit is ook control software)</a:t>
+            </a:r>
+          </a:p>
+          <a:p>
+            <a:pPr lvl="1"/>
+            <a:r>
+              <a:rPr lang="nl-NL" dirty="0"/>
+              <a:t>Je computer gaat van </a:t>
+            </a:r>
+            <a:r>
+              <a:rPr lang="nl-NL" dirty="0" err="1"/>
+              <a:t>standby</a:t>
+            </a:r>
+            <a:r>
+              <a:rPr lang="nl-NL" dirty="0"/>
+              <a:t> ineens aan zonder reden.</a:t>
+            </a:r>
+          </a:p>
+          <a:p>
+            <a:pPr lvl="1"/>
+            <a:endParaRPr lang="nl-NL" dirty="0"/>
+          </a:p>
+          <a:p>
+            <a:pPr lvl="1"/>
+            <a:endParaRPr lang="nl-NL" dirty="0"/>
+          </a:p>
+        </p:txBody>
+      </p:sp>
+    </p:spTree>
+    <p:extLst>
+      <p:ext uri="{BB962C8B-B14F-4D97-AF65-F5344CB8AC3E}">
+        <p14:creationId xmlns:p14="http://schemas.microsoft.com/office/powerpoint/2010/main" val="3190865094"/>
+      </p:ext>
+    </p:extLst>
+  </p:cSld>
+  <p:clrMapOvr>
+    <a:masterClrMapping/>
+  </p:clrMapOvr>
+</p:sld>
+</file>
+
+<file path=ppt/slides/slide14.xml><?xml version="1.0" encoding="utf-8"?>
+<p:sld xmlns:a="http://schemas.openxmlformats.org/drawingml/2006/main" xmlns:r="http://schemas.openxmlformats.org/officeDocument/2006/relationships" xmlns:p="http://schemas.openxmlformats.org/presentationml/2006/main">
+  <p:cSld>
+    <p:spTree>
+      <p:nvGrpSpPr>
+        <p:cNvPr id="1" name=""/>
+        <p:cNvGrpSpPr/>
+        <p:nvPr/>
+      </p:nvGrpSpPr>
+      <p:grpSpPr>
+        <a:xfrm>
+          <a:off x="0" y="0"/>
+          <a:ext cx="0" cy="0"/>
+          <a:chOff x="0" y="0"/>
+          <a:chExt cx="0" cy="0"/>
+        </a:xfrm>
+      </p:grpSpPr>
+      <p:sp>
+        <p:nvSpPr>
+          <p:cNvPr id="2" name="Titel 1">
+            <a:extLst>
+              <a:ext uri="{FF2B5EF4-FFF2-40B4-BE49-F238E27FC236}">
+                <a16:creationId xmlns:a16="http://schemas.microsoft.com/office/drawing/2014/main" id="{773B23E2-D110-25B3-CDF2-318AF570F8F3}"/>
+              </a:ext>
+            </a:extLst>
+          </p:cNvPr>
+          <p:cNvSpPr>
+            <a:spLocks noGrp="1"/>
+          </p:cNvSpPr>
+          <p:nvPr>
+            <p:ph type="title"/>
+          </p:nvPr>
+        </p:nvSpPr>
+        <p:spPr/>
+        <p:txBody>
+          <a:bodyPr/>
+          <a:lstStyle/>
+          <a:p>
+            <a:r>
+              <a:rPr lang="nl-NL" dirty="0" err="1"/>
+              <a:t>Spysoftware</a:t>
+            </a:r>
+            <a:r>
+              <a:rPr lang="nl-NL" dirty="0"/>
+              <a:t> - beveiliging</a:t>
+            </a:r>
+          </a:p>
+        </p:txBody>
+      </p:sp>
+      <p:sp>
+        <p:nvSpPr>
+          <p:cNvPr id="3" name="Tijdelijke aanduiding voor inhoud 2">
+            <a:extLst>
+              <a:ext uri="{FF2B5EF4-FFF2-40B4-BE49-F238E27FC236}">
+                <a16:creationId xmlns:a16="http://schemas.microsoft.com/office/drawing/2014/main" id="{2F46C0FB-42C0-08FD-6952-23E08F85CB92}"/>
+              </a:ext>
+            </a:extLst>
+          </p:cNvPr>
+          <p:cNvSpPr>
+            <a:spLocks noGrp="1"/>
+          </p:cNvSpPr>
+          <p:nvPr>
+            <p:ph idx="1"/>
+          </p:nvPr>
+        </p:nvSpPr>
+        <p:spPr/>
+        <p:txBody>
+          <a:bodyPr/>
+          <a:lstStyle/>
+          <a:p>
+            <a:r>
+              <a:rPr lang="nl-NL" dirty="0"/>
+              <a:t>Meeste </a:t>
+            </a:r>
+            <a:r>
+              <a:rPr lang="nl-NL" dirty="0" err="1"/>
+              <a:t>spysoftware</a:t>
+            </a:r>
+            <a:r>
+              <a:rPr lang="nl-NL" dirty="0"/>
+              <a:t> is te vinden via de standaard beveiliging</a:t>
+            </a:r>
+          </a:p>
+          <a:p>
+            <a:r>
+              <a:rPr lang="nl-NL" dirty="0" err="1"/>
+              <a:t>Mcafee</a:t>
+            </a:r>
+            <a:r>
+              <a:rPr lang="nl-NL" dirty="0"/>
+              <a:t> en AVG zijn iets beter maar deels betaald</a:t>
+            </a:r>
+          </a:p>
+          <a:p>
+            <a:endParaRPr lang="nl-NL" dirty="0"/>
+          </a:p>
+          <a:p>
+            <a:r>
+              <a:rPr lang="nl-NL" dirty="0"/>
+              <a:t>Open geen files waarvan je niet weet waar en van wie ze vandaan komen. Een </a:t>
+            </a:r>
+            <a:r>
+              <a:rPr lang="nl-NL" dirty="0" err="1"/>
+              <a:t>spysoftware</a:t>
+            </a:r>
+            <a:r>
+              <a:rPr lang="nl-NL" dirty="0"/>
+              <a:t> kan al in een afbeelding verstopt zitten. </a:t>
+            </a:r>
+          </a:p>
+          <a:p>
+            <a:r>
+              <a:rPr lang="nl-NL" dirty="0"/>
+              <a:t>Klik niet op links van vreemde bronnen of advertenties die te mooi klinken.</a:t>
+            </a:r>
+          </a:p>
+          <a:p>
+            <a:r>
+              <a:rPr lang="nl-NL" dirty="0"/>
+              <a:t>Voorkom inloggen op publieke netwerken</a:t>
+            </a:r>
+          </a:p>
+          <a:p>
+            <a:endParaRPr lang="nl-NL" dirty="0"/>
+          </a:p>
+        </p:txBody>
+      </p:sp>
+    </p:spTree>
+    <p:extLst>
+      <p:ext uri="{BB962C8B-B14F-4D97-AF65-F5344CB8AC3E}">
+        <p14:creationId xmlns:p14="http://schemas.microsoft.com/office/powerpoint/2010/main" val="3167232495"/>
+      </p:ext>
+    </p:extLst>
+  </p:cSld>
+  <p:clrMapOvr>
+    <a:masterClrMapping/>
+  </p:clrMapOvr>
+</p:sld>
+</file>
+
+<file path=ppt/slides/slide15.xml><?xml version="1.0" encoding="utf-8"?>
+<p:sld xmlns:a="http://schemas.openxmlformats.org/drawingml/2006/main" xmlns:r="http://schemas.openxmlformats.org/officeDocument/2006/relationships" xmlns:p="http://schemas.openxmlformats.org/presentationml/2006/main">
+  <p:cSld>
+    <p:spTree>
+      <p:nvGrpSpPr>
+        <p:cNvPr id="1" name=""/>
+        <p:cNvGrpSpPr/>
+        <p:nvPr/>
+      </p:nvGrpSpPr>
+      <p:grpSpPr>
+        <a:xfrm>
+          <a:off x="0" y="0"/>
+          <a:ext cx="0" cy="0"/>
+          <a:chOff x="0" y="0"/>
+          <a:chExt cx="0" cy="0"/>
+        </a:xfrm>
+      </p:grpSpPr>
+      <p:sp>
+        <p:nvSpPr>
+          <p:cNvPr id="2" name="Titel 1">
+            <a:extLst>
+              <a:ext uri="{FF2B5EF4-FFF2-40B4-BE49-F238E27FC236}">
+                <a16:creationId xmlns:a16="http://schemas.microsoft.com/office/drawing/2014/main" id="{AA9D8D61-0B66-4C27-EF35-7FD222DE7F05}"/>
+              </a:ext>
+            </a:extLst>
+          </p:cNvPr>
+          <p:cNvSpPr>
+            <a:spLocks noGrp="1"/>
+          </p:cNvSpPr>
+          <p:nvPr>
+            <p:ph type="title"/>
+          </p:nvPr>
+        </p:nvSpPr>
+        <p:spPr/>
+        <p:txBody>
+          <a:bodyPr/>
+          <a:lstStyle/>
+          <a:p>
+            <a:r>
+              <a:rPr lang="nl-NL" dirty="0" err="1"/>
+              <a:t>Wireshark</a:t>
+            </a:r>
+            <a:endParaRPr lang="nl-NL" dirty="0"/>
+          </a:p>
+        </p:txBody>
+      </p:sp>
+      <p:sp>
+        <p:nvSpPr>
+          <p:cNvPr id="3" name="Tijdelijke aanduiding voor inhoud 2">
+            <a:extLst>
+              <a:ext uri="{FF2B5EF4-FFF2-40B4-BE49-F238E27FC236}">
+                <a16:creationId xmlns:a16="http://schemas.microsoft.com/office/drawing/2014/main" id="{73D65B2C-0B29-6837-1A38-EBF4B3F9DA5A}"/>
+              </a:ext>
+            </a:extLst>
+          </p:cNvPr>
+          <p:cNvSpPr>
+            <a:spLocks noGrp="1"/>
+          </p:cNvSpPr>
+          <p:nvPr>
+            <p:ph idx="1"/>
+          </p:nvPr>
+        </p:nvSpPr>
+        <p:spPr/>
+        <p:txBody>
+          <a:bodyPr/>
+          <a:lstStyle/>
+          <a:p>
+            <a:r>
+              <a:rPr lang="nl-NL" dirty="0" err="1"/>
+              <a:t>Wireshark</a:t>
+            </a:r>
+            <a:r>
+              <a:rPr lang="nl-NL" dirty="0"/>
+              <a:t> is een soort afluister programma dat in een grijs gebied valt.</a:t>
+            </a:r>
+          </a:p>
+          <a:p>
+            <a:r>
+              <a:rPr lang="nl-NL" dirty="0"/>
+              <a:t>Er is een opdracht beschikbaar voor maar die is </a:t>
+            </a:r>
+            <a:r>
+              <a:rPr lang="nl-NL" b="1" dirty="0">
+                <a:solidFill>
+                  <a:srgbClr val="FF0000"/>
+                </a:solidFill>
+              </a:rPr>
+              <a:t>NIET</a:t>
+            </a:r>
+            <a:r>
+              <a:rPr lang="nl-NL" dirty="0"/>
+              <a:t> verplicht.</a:t>
+            </a:r>
+          </a:p>
+          <a:p>
+            <a:r>
+              <a:rPr lang="nl-NL" b="1" dirty="0">
+                <a:solidFill>
+                  <a:srgbClr val="FF0000"/>
+                </a:solidFill>
+              </a:rPr>
+              <a:t>BELANGRIJK</a:t>
+            </a:r>
+            <a:r>
+              <a:rPr lang="nl-NL" dirty="0"/>
+              <a:t>: DOE dit </a:t>
+            </a:r>
+            <a:r>
+              <a:rPr lang="nl-NL" b="1" dirty="0">
+                <a:solidFill>
+                  <a:srgbClr val="FF0000"/>
+                </a:solidFill>
+              </a:rPr>
+              <a:t>NIET</a:t>
+            </a:r>
+            <a:r>
+              <a:rPr lang="nl-NL" dirty="0"/>
+              <a:t> op het </a:t>
+            </a:r>
+            <a:r>
+              <a:rPr lang="nl-NL" dirty="0" err="1"/>
+              <a:t>eduroam</a:t>
+            </a:r>
+            <a:r>
+              <a:rPr lang="nl-NL" dirty="0"/>
+              <a:t> netwerk maar op het ICT netwerk. Je IP wordt anders </a:t>
+            </a:r>
+            <a:r>
+              <a:rPr lang="nl-NL" b="1" dirty="0">
+                <a:solidFill>
+                  <a:srgbClr val="FF0000"/>
+                </a:solidFill>
+              </a:rPr>
+              <a:t>geblokkeerd. </a:t>
+            </a:r>
+          </a:p>
+        </p:txBody>
+      </p:sp>
+      <p:pic>
+        <p:nvPicPr>
+          <p:cNvPr id="1026" name="Picture 2" descr="Wireshark - Free Icon PNG, SVG">
+            <a:extLst>
+              <a:ext uri="{FF2B5EF4-FFF2-40B4-BE49-F238E27FC236}">
+                <a16:creationId xmlns:a16="http://schemas.microsoft.com/office/drawing/2014/main" id="{6DC348A4-C0E4-739B-43B6-89DBF7F1C8C8}"/>
+              </a:ext>
+            </a:extLst>
+          </p:cNvPr>
+          <p:cNvPicPr>
+            <a:picLocks noChangeAspect="1" noChangeArrowheads="1"/>
+          </p:cNvPicPr>
+          <p:nvPr/>
+        </p:nvPicPr>
+        <p:blipFill>
+          <a:blip r:embed="rId2">
+            <a:extLst>
+              <a:ext uri="{28A0092B-C50C-407E-A947-70E740481C1C}">
+                <a14:useLocalDpi xmlns:a14="http://schemas.microsoft.com/office/drawing/2010/main" val="0"/>
+              </a:ext>
+            </a:extLst>
+          </a:blip>
+          <a:srcRect/>
+          <a:stretch>
+            <a:fillRect/>
+          </a:stretch>
+        </p:blipFill>
+        <p:spPr bwMode="auto">
+          <a:xfrm>
+            <a:off x="9938478" y="122250"/>
+            <a:ext cx="1811311" cy="1811311"/>
+          </a:xfrm>
+          <a:prstGeom prst="rect">
+            <a:avLst/>
+          </a:prstGeom>
+          <a:noFill/>
+          <a:extLst>
+            <a:ext uri="{909E8E84-426E-40DD-AFC4-6F175D3DCCD1}">
+              <a14:hiddenFill xmlns:a14="http://schemas.microsoft.com/office/drawing/2010/main">
+                <a:solidFill>
+                  <a:srgbClr val="FFFFFF"/>
+                </a:solidFill>
+              </a14:hiddenFill>
+            </a:ext>
+          </a:extLst>
+        </p:spPr>
+      </p:pic>
+    </p:spTree>
+    <p:extLst>
+      <p:ext uri="{BB962C8B-B14F-4D97-AF65-F5344CB8AC3E}">
+        <p14:creationId xmlns:p14="http://schemas.microsoft.com/office/powerpoint/2010/main" val="2464847785"/>
+      </p:ext>
+    </p:extLst>
+  </p:cSld>
+  <p:clrMapOvr>
+    <a:masterClrMapping/>
+  </p:clrMapOvr>
+</p:sld>
+</file>
+
+<file path=ppt/slides/slide16.xml><?xml version="1.0" encoding="utf-8"?>
+<p:sld xmlns:a="http://schemas.openxmlformats.org/drawingml/2006/main" xmlns:r="http://schemas.openxmlformats.org/officeDocument/2006/relationships" xmlns:p="http://schemas.openxmlformats.org/presentationml/2006/main">
+  <p:cSld>
+    <p:spTree>
+      <p:nvGrpSpPr>
+        <p:cNvPr id="1" name=""/>
+        <p:cNvGrpSpPr/>
+        <p:nvPr/>
+      </p:nvGrpSpPr>
+      <p:grpSpPr>
+        <a:xfrm>
+          <a:off x="0" y="0"/>
+          <a:ext cx="0" cy="0"/>
+          <a:chOff x="0" y="0"/>
+          <a:chExt cx="0" cy="0"/>
+        </a:xfrm>
+      </p:grpSpPr>
+      <p:sp>
+        <p:nvSpPr>
+          <p:cNvPr id="2" name="Titel 1">
+            <a:extLst>
+              <a:ext uri="{FF2B5EF4-FFF2-40B4-BE49-F238E27FC236}">
+                <a16:creationId xmlns:a16="http://schemas.microsoft.com/office/drawing/2014/main" id="{B11A3F00-D22C-8C45-2591-74E8FD01CE37}"/>
+              </a:ext>
+            </a:extLst>
+          </p:cNvPr>
+          <p:cNvSpPr>
+            <a:spLocks noGrp="1"/>
+          </p:cNvSpPr>
+          <p:nvPr>
+            <p:ph type="title"/>
+          </p:nvPr>
+        </p:nvSpPr>
+        <p:spPr/>
+        <p:txBody>
+          <a:bodyPr/>
+          <a:lstStyle/>
+          <a:p>
+            <a:r>
+              <a:rPr lang="nl-NL" dirty="0"/>
+              <a:t>Volgende week</a:t>
+            </a:r>
+          </a:p>
+        </p:txBody>
+      </p:sp>
+      <p:sp>
+        <p:nvSpPr>
+          <p:cNvPr id="3" name="Tijdelijke aanduiding voor inhoud 2">
+            <a:extLst>
+              <a:ext uri="{FF2B5EF4-FFF2-40B4-BE49-F238E27FC236}">
+                <a16:creationId xmlns:a16="http://schemas.microsoft.com/office/drawing/2014/main" id="{A186008C-654E-6F3B-AA1A-BDA418F9A75C}"/>
+              </a:ext>
+            </a:extLst>
+          </p:cNvPr>
+          <p:cNvSpPr>
+            <a:spLocks noGrp="1"/>
+          </p:cNvSpPr>
+          <p:nvPr>
+            <p:ph idx="1"/>
+          </p:nvPr>
+        </p:nvSpPr>
+        <p:spPr/>
+        <p:txBody>
+          <a:bodyPr/>
+          <a:lstStyle/>
+          <a:p>
+            <a:r>
+              <a:rPr lang="nl-NL" dirty="0"/>
+              <a:t>Wetgeving deel 2</a:t>
+            </a:r>
+          </a:p>
+          <a:p>
+            <a:pPr lvl="1"/>
+            <a:r>
+              <a:rPr lang="nl-NL" dirty="0"/>
+              <a:t>Nederlandse cyber wetgeving</a:t>
+            </a:r>
+          </a:p>
+          <a:p>
+            <a:pPr lvl="1"/>
+            <a:r>
+              <a:rPr lang="nl-NL" dirty="0"/>
+              <a:t>Amerikaanse cyber wetgeving</a:t>
+            </a:r>
+          </a:p>
+          <a:p>
+            <a:pPr lvl="1"/>
+            <a:r>
+              <a:rPr lang="nl-NL" dirty="0" err="1"/>
+              <a:t>Chineese</a:t>
+            </a:r>
+            <a:r>
+              <a:rPr lang="nl-NL" dirty="0"/>
+              <a:t> cyber wetgeving</a:t>
+            </a:r>
+          </a:p>
+          <a:p>
+            <a:r>
+              <a:rPr lang="nl-NL" dirty="0"/>
+              <a:t>Contracten en NDA</a:t>
+            </a:r>
+          </a:p>
+        </p:txBody>
+      </p:sp>
+    </p:spTree>
+    <p:extLst>
+      <p:ext uri="{BB962C8B-B14F-4D97-AF65-F5344CB8AC3E}">
+        <p14:creationId xmlns:p14="http://schemas.microsoft.com/office/powerpoint/2010/main" val="2527215279"/>
+      </p:ext>
+    </p:extLst>
+  </p:cSld>
+  <p:clrMapOvr>
+    <a:masterClrMapping/>
+  </p:clrMapOvr>
+</p:sld>
+</file>
+
+<file path=ppt/slides/slide2.xml><?xml version="1.0" encoding="utf-8"?>
+<p:sld xmlns:a="http://schemas.openxmlformats.org/drawingml/2006/main" xmlns:r="http://schemas.openxmlformats.org/officeDocument/2006/relationships" xmlns:p="http://schemas.openxmlformats.org/presentationml/2006/main">
+  <p:cSld>
+    <p:spTree>
+      <p:nvGrpSpPr>
+        <p:cNvPr id="1" name=""/>
+        <p:cNvGrpSpPr/>
+        <p:nvPr/>
+      </p:nvGrpSpPr>
+      <p:grpSpPr>
+        <a:xfrm>
+          <a:off x="0" y="0"/>
+          <a:ext cx="0" cy="0"/>
+          <a:chOff x="0" y="0"/>
+          <a:chExt cx="0" cy="0"/>
+        </a:xfrm>
+      </p:grpSpPr>
+      <p:sp>
+        <p:nvSpPr>
+          <p:cNvPr id="2" name="Titel 1">
+            <a:extLst>
+              <a:ext uri="{FF2B5EF4-FFF2-40B4-BE49-F238E27FC236}">
+                <a16:creationId xmlns:a16="http://schemas.microsoft.com/office/drawing/2014/main" id="{BBC467E5-39E6-9E7F-1C58-661632973934}"/>
+              </a:ext>
+            </a:extLst>
+          </p:cNvPr>
+          <p:cNvSpPr>
+            <a:spLocks noGrp="1"/>
+          </p:cNvSpPr>
+          <p:nvPr>
+            <p:ph type="title"/>
+          </p:nvPr>
+        </p:nvSpPr>
+        <p:spPr/>
+        <p:txBody>
+          <a:bodyPr/>
+          <a:lstStyle/>
+          <a:p>
+            <a:r>
+              <a:rPr lang="nl-NL" dirty="0"/>
+              <a:t>Programma</a:t>
+            </a:r>
+          </a:p>
+        </p:txBody>
+      </p:sp>
+      <p:sp>
+        <p:nvSpPr>
+          <p:cNvPr id="3" name="Tijdelijke aanduiding voor inhoud 2">
+            <a:extLst>
+              <a:ext uri="{FF2B5EF4-FFF2-40B4-BE49-F238E27FC236}">
+                <a16:creationId xmlns:a16="http://schemas.microsoft.com/office/drawing/2014/main" id="{DE110306-4AAB-9607-E18E-ACBAC34BDE30}"/>
+              </a:ext>
+            </a:extLst>
+          </p:cNvPr>
+          <p:cNvSpPr>
+            <a:spLocks noGrp="1"/>
+          </p:cNvSpPr>
+          <p:nvPr>
+            <p:ph idx="1"/>
+          </p:nvPr>
+        </p:nvSpPr>
+        <p:spPr/>
+        <p:txBody>
+          <a:bodyPr/>
+          <a:lstStyle/>
+          <a:p>
+            <a:r>
+              <a:rPr lang="nl-NL" dirty="0"/>
+              <a:t>Terugblik vorige les</a:t>
+            </a:r>
+          </a:p>
+          <a:p>
+            <a:r>
+              <a:rPr lang="nl-NL" dirty="0"/>
+              <a:t>Leerdoelen</a:t>
+            </a:r>
+          </a:p>
+          <a:p>
+            <a:r>
+              <a:rPr lang="nl-NL" dirty="0"/>
+              <a:t>Netwerken</a:t>
+            </a:r>
+          </a:p>
+          <a:p>
+            <a:r>
+              <a:rPr lang="nl-NL" dirty="0"/>
+              <a:t>Man in </a:t>
+            </a:r>
+            <a:r>
+              <a:rPr lang="nl-NL" dirty="0" err="1"/>
+              <a:t>the</a:t>
+            </a:r>
+            <a:r>
+              <a:rPr lang="nl-NL" dirty="0"/>
+              <a:t> </a:t>
+            </a:r>
+            <a:r>
+              <a:rPr lang="nl-NL" dirty="0" err="1"/>
+              <a:t>middle</a:t>
+            </a:r>
+            <a:endParaRPr lang="nl-NL" dirty="0"/>
+          </a:p>
+          <a:p>
+            <a:r>
+              <a:rPr lang="nl-NL" dirty="0"/>
+              <a:t>Netwerk beveiliging</a:t>
+            </a:r>
+          </a:p>
+          <a:p>
+            <a:r>
+              <a:rPr lang="nl-NL" dirty="0" err="1"/>
+              <a:t>Wireshark</a:t>
+            </a:r>
+            <a:r>
+              <a:rPr lang="nl-NL" dirty="0"/>
+              <a:t> en netwerkverkeer</a:t>
+            </a:r>
+          </a:p>
+          <a:p>
+            <a:r>
+              <a:rPr lang="nl-NL" dirty="0"/>
+              <a:t>Volgende week</a:t>
+            </a:r>
+          </a:p>
+        </p:txBody>
+      </p:sp>
+    </p:spTree>
+    <p:extLst>
+      <p:ext uri="{BB962C8B-B14F-4D97-AF65-F5344CB8AC3E}">
+        <p14:creationId xmlns:p14="http://schemas.microsoft.com/office/powerpoint/2010/main" val="3969768279"/>
+      </p:ext>
+    </p:extLst>
+  </p:cSld>
+  <p:clrMapOvr>
+    <a:masterClrMapping/>
+  </p:clrMapOvr>
+</p:sld>
+</file>
+
+<file path=ppt/slides/slide3.xml><?xml version="1.0" encoding="utf-8"?>
+<p:sld xmlns:a="http://schemas.openxmlformats.org/drawingml/2006/main" xmlns:r="http://schemas.openxmlformats.org/officeDocument/2006/relationships" xmlns:p="http://schemas.openxmlformats.org/presentationml/2006/main">
+  <p:cSld>
+    <p:spTree>
+      <p:nvGrpSpPr>
+        <p:cNvPr id="1" name=""/>
+        <p:cNvGrpSpPr/>
+        <p:nvPr/>
+      </p:nvGrpSpPr>
+      <p:grpSpPr>
+        <a:xfrm>
+          <a:off x="0" y="0"/>
+          <a:ext cx="0" cy="0"/>
+          <a:chOff x="0" y="0"/>
+          <a:chExt cx="0" cy="0"/>
+        </a:xfrm>
+      </p:grpSpPr>
+      <p:sp>
+        <p:nvSpPr>
+          <p:cNvPr id="2" name="Titel 1">
+            <a:extLst>
+              <a:ext uri="{FF2B5EF4-FFF2-40B4-BE49-F238E27FC236}">
+                <a16:creationId xmlns:a16="http://schemas.microsoft.com/office/drawing/2014/main" id="{8D05855A-447C-1837-7276-355F822E933B}"/>
+              </a:ext>
+            </a:extLst>
+          </p:cNvPr>
+          <p:cNvSpPr>
+            <a:spLocks noGrp="1"/>
+          </p:cNvSpPr>
+          <p:nvPr>
+            <p:ph type="title"/>
+          </p:nvPr>
+        </p:nvSpPr>
+        <p:spPr/>
+        <p:txBody>
+          <a:bodyPr/>
+          <a:lstStyle/>
+          <a:p>
+            <a:r>
+              <a:rPr lang="nl-NL" dirty="0"/>
+              <a:t>Leerdoelen</a:t>
+            </a:r>
+          </a:p>
+        </p:txBody>
+      </p:sp>
+      <p:sp>
+        <p:nvSpPr>
+          <p:cNvPr id="3" name="Tijdelijke aanduiding voor inhoud 2">
+            <a:extLst>
+              <a:ext uri="{FF2B5EF4-FFF2-40B4-BE49-F238E27FC236}">
+                <a16:creationId xmlns:a16="http://schemas.microsoft.com/office/drawing/2014/main" id="{D9C96C40-E495-1DDD-8C30-9641A0EAEC2A}"/>
+              </a:ext>
+            </a:extLst>
+          </p:cNvPr>
+          <p:cNvSpPr>
+            <a:spLocks noGrp="1"/>
+          </p:cNvSpPr>
+          <p:nvPr>
+            <p:ph idx="1"/>
+          </p:nvPr>
+        </p:nvSpPr>
+        <p:spPr/>
+        <p:txBody>
+          <a:bodyPr/>
+          <a:lstStyle/>
+          <a:p>
+            <a:r>
+              <a:rPr lang="nl-NL" dirty="0"/>
+              <a:t>Aan het einde van de les:</a:t>
+            </a:r>
+          </a:p>
+          <a:p>
+            <a:pPr lvl="1"/>
+            <a:r>
+              <a:rPr lang="nl-NL" dirty="0"/>
+              <a:t>Weet je de basis structuur van een netwerk</a:t>
+            </a:r>
+          </a:p>
+          <a:p>
+            <a:pPr lvl="1"/>
+            <a:r>
+              <a:rPr lang="nl-NL" dirty="0"/>
+              <a:t>Weet je wat voor soort berichten over een netwerk gaan</a:t>
+            </a:r>
+          </a:p>
+          <a:p>
+            <a:pPr lvl="1"/>
+            <a:r>
+              <a:rPr lang="nl-NL" dirty="0"/>
+              <a:t>Weet je hoe een man in de </a:t>
+            </a:r>
+            <a:r>
+              <a:rPr lang="nl-NL" dirty="0" err="1"/>
+              <a:t>middle</a:t>
+            </a:r>
+            <a:r>
+              <a:rPr lang="nl-NL" dirty="0"/>
+              <a:t> werkt</a:t>
+            </a:r>
+          </a:p>
+          <a:p>
+            <a:pPr lvl="1"/>
+            <a:r>
+              <a:rPr lang="nl-NL" dirty="0"/>
+              <a:t>Weet je wat te doen om een man in de </a:t>
+            </a:r>
+            <a:r>
+              <a:rPr lang="nl-NL" dirty="0" err="1"/>
+              <a:t>middle</a:t>
+            </a:r>
+            <a:r>
+              <a:rPr lang="nl-NL" dirty="0"/>
+              <a:t> tegen te gaan</a:t>
+            </a:r>
+          </a:p>
+          <a:p>
+            <a:pPr lvl="1"/>
+            <a:r>
+              <a:rPr lang="nl-NL" dirty="0"/>
+              <a:t>Weet je wat je kan doen om een netwerk gepast te beveiligen</a:t>
+            </a:r>
+          </a:p>
+          <a:p>
+            <a:pPr lvl="1"/>
+            <a:r>
+              <a:rPr lang="nl-NL" dirty="0"/>
+              <a:t>Kan je een Netwerk monitoren en berichten filteren</a:t>
+            </a:r>
+          </a:p>
+        </p:txBody>
+      </p:sp>
+    </p:spTree>
+    <p:extLst>
+      <p:ext uri="{BB962C8B-B14F-4D97-AF65-F5344CB8AC3E}">
+        <p14:creationId xmlns:p14="http://schemas.microsoft.com/office/powerpoint/2010/main" val="2616526800"/>
+      </p:ext>
+    </p:extLst>
+  </p:cSld>
+  <p:clrMapOvr>
+    <a:masterClrMapping/>
+  </p:clrMapOvr>
+</p:sld>
+</file>
+
+<file path=ppt/slides/slide4.xml><?xml version="1.0" encoding="utf-8"?>
+<p:sld xmlns:a="http://schemas.openxmlformats.org/drawingml/2006/main" xmlns:r="http://schemas.openxmlformats.org/officeDocument/2006/relationships" xmlns:p="http://schemas.openxmlformats.org/presentationml/2006/main">
+  <p:cSld>
+    <p:spTree>
+      <p:nvGrpSpPr>
+        <p:cNvPr id="1" name=""/>
+        <p:cNvGrpSpPr/>
+        <p:nvPr/>
+      </p:nvGrpSpPr>
+      <p:grpSpPr>
+        <a:xfrm>
+          <a:off x="0" y="0"/>
+          <a:ext cx="0" cy="0"/>
+          <a:chOff x="0" y="0"/>
+          <a:chExt cx="0" cy="0"/>
+        </a:xfrm>
+      </p:grpSpPr>
+      <p:sp>
+        <p:nvSpPr>
+          <p:cNvPr id="2" name="Titel 1">
+            <a:extLst>
+              <a:ext uri="{FF2B5EF4-FFF2-40B4-BE49-F238E27FC236}">
+                <a16:creationId xmlns:a16="http://schemas.microsoft.com/office/drawing/2014/main" id="{620CD66F-CF73-FEB2-B219-E7F12F8AD8B5}"/>
+              </a:ext>
+            </a:extLst>
+          </p:cNvPr>
+          <p:cNvSpPr>
+            <a:spLocks noGrp="1"/>
+          </p:cNvSpPr>
+          <p:nvPr>
+            <p:ph type="title"/>
+          </p:nvPr>
+        </p:nvSpPr>
+        <p:spPr>
+          <a:xfrm>
+            <a:off x="838200" y="365125"/>
+            <a:ext cx="10515600" cy="1325563"/>
+          </a:xfrm>
+        </p:spPr>
+        <p:txBody>
+          <a:bodyPr anchor="ctr">
+            <a:normAutofit/>
+          </a:bodyPr>
+          <a:lstStyle/>
+          <a:p>
+            <a:r>
+              <a:rPr lang="nl-NL" dirty="0"/>
+              <a:t>Netwerken</a:t>
+            </a:r>
+          </a:p>
+        </p:txBody>
+      </p:sp>
+      <p:pic>
+        <p:nvPicPr>
+          <p:cNvPr id="5" name="Graphic 4" descr="Netwerk met effen opvulling">
+            <a:extLst>
+              <a:ext uri="{FF2B5EF4-FFF2-40B4-BE49-F238E27FC236}">
+                <a16:creationId xmlns:a16="http://schemas.microsoft.com/office/drawing/2014/main" id="{D2DA0BF0-5957-EBB2-5B1B-FDB47B929B9B}"/>
+              </a:ext>
+            </a:extLst>
+          </p:cNvPr>
+          <p:cNvPicPr>
+            <a:picLocks noChangeAspect="1"/>
+          </p:cNvPicPr>
+          <p:nvPr/>
+        </p:nvPicPr>
+        <p:blipFill>
+          <a:blip r:embed="rId2">
+            <a:extLst>
+              <a:ext uri="{96DAC541-7B7A-43D3-8B79-37D633B846F1}">
+                <asvg:svgBlip xmlns:asvg="http://schemas.microsoft.com/office/drawing/2016/SVG/main" r:embed="rId3"/>
+              </a:ext>
+            </a:extLst>
+          </a:blip>
+          <a:stretch>
+            <a:fillRect/>
+          </a:stretch>
+        </p:blipFill>
+        <p:spPr>
+          <a:xfrm>
+            <a:off x="1419708" y="1825625"/>
+            <a:ext cx="4018584" cy="4018584"/>
+          </a:xfrm>
+          <a:prstGeom prst="rect">
+            <a:avLst/>
+          </a:prstGeom>
+        </p:spPr>
+      </p:pic>
+      <p:sp>
+        <p:nvSpPr>
+          <p:cNvPr id="3" name="Tijdelijke aanduiding voor inhoud 2">
+            <a:extLst>
+              <a:ext uri="{FF2B5EF4-FFF2-40B4-BE49-F238E27FC236}">
+                <a16:creationId xmlns:a16="http://schemas.microsoft.com/office/drawing/2014/main" id="{189B7252-C2BB-B3F6-C40F-DA15C2ADD920}"/>
+              </a:ext>
+            </a:extLst>
+          </p:cNvPr>
+          <p:cNvSpPr>
+            <a:spLocks noGrp="1"/>
+          </p:cNvSpPr>
+          <p:nvPr>
+            <p:ph sz="half" idx="2"/>
+          </p:nvPr>
+        </p:nvSpPr>
+        <p:spPr>
+          <a:xfrm>
+            <a:off x="6172200" y="1825625"/>
+            <a:ext cx="5181600" cy="4018584"/>
+          </a:xfrm>
+        </p:spPr>
+        <p:txBody>
+          <a:bodyPr>
+            <a:normAutofit/>
+          </a:bodyPr>
+          <a:lstStyle/>
+          <a:p>
+            <a:r>
+              <a:rPr lang="nl-NL" dirty="0"/>
+              <a:t>Een connectie tussen twee of meer computerende apparaten</a:t>
+            </a:r>
+          </a:p>
+          <a:p>
+            <a:r>
+              <a:rPr lang="nl-NL" dirty="0"/>
+              <a:t>3 kern-types van netwerken</a:t>
+            </a:r>
+          </a:p>
+          <a:p>
+            <a:pPr lvl="1"/>
+            <a:r>
+              <a:rPr lang="nl-NL" sz="2800"/>
+              <a:t>Direct pc-pc (Komt bijna niet meer voor)</a:t>
+            </a:r>
+          </a:p>
+          <a:p>
+            <a:pPr lvl="1"/>
+            <a:r>
+              <a:rPr lang="nl-NL" sz="2800"/>
+              <a:t>Kabelnetwerk (Ethernet, USB-C)</a:t>
+            </a:r>
+          </a:p>
+          <a:p>
+            <a:pPr lvl="1"/>
+            <a:r>
+              <a:rPr lang="nl-NL" sz="2800"/>
+              <a:t>Draadloos (Wifi, 5G)</a:t>
+            </a:r>
+          </a:p>
+          <a:p>
+            <a:endParaRPr lang="nl-NL" dirty="0"/>
+          </a:p>
+        </p:txBody>
+      </p:sp>
+    </p:spTree>
+    <p:extLst>
+      <p:ext uri="{BB962C8B-B14F-4D97-AF65-F5344CB8AC3E}">
+        <p14:creationId xmlns:p14="http://schemas.microsoft.com/office/powerpoint/2010/main" val="3061633083"/>
+      </p:ext>
+    </p:extLst>
+  </p:cSld>
+  <p:clrMapOvr>
+    <a:masterClrMapping/>
+  </p:clrMapOvr>
+</p:sld>
+</file>
+
+<file path=ppt/slides/slide5.xml><?xml version="1.0" encoding="utf-8"?>
+<p:sld xmlns:a="http://schemas.openxmlformats.org/drawingml/2006/main" xmlns:r="http://schemas.openxmlformats.org/officeDocument/2006/relationships" xmlns:p="http://schemas.openxmlformats.org/presentationml/2006/main">
+  <p:cSld>
+    <p:spTree>
+      <p:nvGrpSpPr>
+        <p:cNvPr id="1" name="">
+          <a:extLst>
+            <a:ext uri="{FF2B5EF4-FFF2-40B4-BE49-F238E27FC236}">
+              <a16:creationId xmlns:a16="http://schemas.microsoft.com/office/drawing/2014/main" id="{31ED9FCC-7831-D105-403F-A8314BB0861B}"/>
+            </a:ext>
+          </a:extLst>
+        </p:cNvPr>
+        <p:cNvGrpSpPr/>
+        <p:nvPr/>
+      </p:nvGrpSpPr>
+      <p:grpSpPr>
+        <a:xfrm>
+          <a:off x="0" y="0"/>
+          <a:ext cx="0" cy="0"/>
+          <a:chOff x="0" y="0"/>
+          <a:chExt cx="0" cy="0"/>
+        </a:xfrm>
+      </p:grpSpPr>
+      <p:sp>
+        <p:nvSpPr>
+          <p:cNvPr id="2" name="Titel 1">
+            <a:extLst>
+              <a:ext uri="{FF2B5EF4-FFF2-40B4-BE49-F238E27FC236}">
+                <a16:creationId xmlns:a16="http://schemas.microsoft.com/office/drawing/2014/main" id="{7E4C9877-E549-5D69-27BA-0A5EA4AD62C1}"/>
+              </a:ext>
+            </a:extLst>
+          </p:cNvPr>
+          <p:cNvSpPr>
+            <a:spLocks noGrp="1"/>
+          </p:cNvSpPr>
+          <p:nvPr>
+            <p:ph type="title"/>
+          </p:nvPr>
+        </p:nvSpPr>
+        <p:spPr/>
+        <p:txBody>
+          <a:bodyPr/>
+          <a:lstStyle/>
+          <a:p>
+            <a:r>
+              <a:rPr lang="nl-NL"/>
+              <a:t>Netwerk aanvallen</a:t>
+            </a:r>
+          </a:p>
+        </p:txBody>
+      </p:sp>
+      <p:sp>
+        <p:nvSpPr>
+          <p:cNvPr id="3" name="Tijdelijke aanduiding voor inhoud 2">
+            <a:extLst>
+              <a:ext uri="{FF2B5EF4-FFF2-40B4-BE49-F238E27FC236}">
+                <a16:creationId xmlns:a16="http://schemas.microsoft.com/office/drawing/2014/main" id="{51BCE78C-2EB1-CD07-E8E9-3BA9D9AE7939}"/>
+              </a:ext>
+            </a:extLst>
+          </p:cNvPr>
+          <p:cNvSpPr>
+            <a:spLocks noGrp="1"/>
+          </p:cNvSpPr>
+          <p:nvPr>
+            <p:ph idx="1"/>
+          </p:nvPr>
+        </p:nvSpPr>
+        <p:spPr/>
+        <p:txBody>
+          <a:bodyPr>
+            <a:normAutofit fontScale="85000" lnSpcReduction="20000"/>
+          </a:bodyPr>
+          <a:lstStyle/>
+          <a:p>
+            <a:r>
+              <a:rPr lang="nl-NL" dirty="0"/>
+              <a:t>Blokkade/weigeringsaanvallen</a:t>
+            </a:r>
+          </a:p>
+          <a:p>
+            <a:pPr lvl="1"/>
+            <a:r>
+              <a:rPr lang="nl-NL" dirty="0"/>
+              <a:t>DDOS – Distributed </a:t>
+            </a:r>
+            <a:r>
+              <a:rPr lang="nl-NL" dirty="0" err="1"/>
+              <a:t>denial</a:t>
+            </a:r>
+            <a:r>
+              <a:rPr lang="nl-NL" dirty="0"/>
+              <a:t> of services</a:t>
+            </a:r>
+          </a:p>
+          <a:p>
+            <a:pPr lvl="2"/>
+            <a:r>
+              <a:rPr lang="nl-NL" dirty="0"/>
+              <a:t>Het platleggen van een systeem door het netwerk te bombarderen met verzoeken van vele plaatsen</a:t>
+            </a:r>
+          </a:p>
+          <a:p>
+            <a:pPr lvl="1"/>
+            <a:r>
+              <a:rPr lang="nl-NL" dirty="0"/>
+              <a:t>Volume bezetting/sturing</a:t>
+            </a:r>
+          </a:p>
+          <a:p>
+            <a:pPr lvl="2"/>
+            <a:r>
+              <a:rPr lang="nl-NL" dirty="0"/>
+              <a:t>Een netwerk bezet houden waardoor werkelijke berichten niet erdoorheen komen</a:t>
+            </a:r>
+          </a:p>
+          <a:p>
+            <a:pPr lvl="1"/>
+            <a:r>
+              <a:rPr lang="nl-NL" dirty="0"/>
+              <a:t>Malafide geformatteerde pakketten aanvallen</a:t>
+            </a:r>
+          </a:p>
+          <a:p>
+            <a:pPr lvl="2"/>
+            <a:r>
+              <a:rPr lang="nl-NL" dirty="0"/>
+              <a:t>Een invoer die de server/service der mate verlangzaamd dat deze niet goed meer kan functioneren</a:t>
+            </a:r>
+          </a:p>
+          <a:p>
+            <a:r>
+              <a:rPr lang="nl-NL" dirty="0"/>
+              <a:t>Toegang aanvallen</a:t>
+            </a:r>
+          </a:p>
+          <a:p>
+            <a:pPr lvl="1"/>
+            <a:r>
+              <a:rPr lang="nl-NL" dirty="0"/>
+              <a:t>IP </a:t>
+            </a:r>
+            <a:r>
+              <a:rPr lang="nl-NL" dirty="0" err="1"/>
+              <a:t>spoofing</a:t>
+            </a:r>
+            <a:endParaRPr lang="nl-NL" dirty="0"/>
+          </a:p>
+          <a:p>
+            <a:pPr lvl="2"/>
+            <a:r>
+              <a:rPr lang="nl-NL" dirty="0"/>
+              <a:t>Maskeer je IP adres om te doen alsof je al op een netwerk zit of hoort om toegang te krijgen.</a:t>
+            </a:r>
+          </a:p>
+          <a:p>
+            <a:pPr lvl="1"/>
+            <a:r>
+              <a:rPr lang="nl-NL" dirty="0"/>
+              <a:t>Man in </a:t>
+            </a:r>
+            <a:r>
+              <a:rPr lang="nl-NL" dirty="0" err="1"/>
+              <a:t>the</a:t>
+            </a:r>
+            <a:r>
+              <a:rPr lang="nl-NL" dirty="0"/>
+              <a:t> </a:t>
+            </a:r>
+            <a:r>
+              <a:rPr lang="nl-NL" dirty="0" err="1"/>
+              <a:t>middle</a:t>
+            </a:r>
+            <a:r>
+              <a:rPr lang="nl-NL" dirty="0"/>
+              <a:t>/ </a:t>
+            </a:r>
+            <a:r>
+              <a:rPr lang="nl-NL" dirty="0" err="1"/>
+              <a:t>packet</a:t>
+            </a:r>
+            <a:r>
+              <a:rPr lang="nl-NL" dirty="0"/>
+              <a:t> </a:t>
+            </a:r>
+            <a:r>
+              <a:rPr lang="nl-NL" dirty="0" err="1"/>
+              <a:t>sniffing</a:t>
+            </a:r>
+            <a:endParaRPr lang="nl-NL" dirty="0"/>
+          </a:p>
+          <a:p>
+            <a:pPr lvl="2"/>
+            <a:r>
+              <a:rPr lang="nl-NL" dirty="0"/>
+              <a:t>Netwerken afluisteren om data te krijgen of om cruciale gegevens te vinden om meer toegang te krijgen.</a:t>
+            </a:r>
+          </a:p>
+        </p:txBody>
+      </p:sp>
+      <p:pic>
+        <p:nvPicPr>
+          <p:cNvPr id="5" name="Graphic 4" descr="Bakstenen muur met effen opvulling">
+            <a:extLst>
+              <a:ext uri="{FF2B5EF4-FFF2-40B4-BE49-F238E27FC236}">
+                <a16:creationId xmlns:a16="http://schemas.microsoft.com/office/drawing/2014/main" id="{1A534065-879A-3BA4-B7D5-DF39963B0FF4}"/>
+              </a:ext>
+            </a:extLst>
+          </p:cNvPr>
+          <p:cNvPicPr>
+            <a:picLocks noChangeAspect="1"/>
+          </p:cNvPicPr>
+          <p:nvPr/>
+        </p:nvPicPr>
+        <p:blipFill>
+          <a:blip r:embed="rId2">
+            <a:extLst>
+              <a:ext uri="{96DAC541-7B7A-43D3-8B79-37D633B846F1}">
+                <asvg:svgBlip xmlns:asvg="http://schemas.microsoft.com/office/drawing/2016/SVG/main" r:embed="rId3"/>
+              </a:ext>
+            </a:extLst>
+          </a:blip>
+          <a:stretch>
+            <a:fillRect/>
+          </a:stretch>
+        </p:blipFill>
+        <p:spPr>
+          <a:xfrm>
+            <a:off x="9713626" y="425415"/>
+            <a:ext cx="2026170" cy="2026170"/>
+          </a:xfrm>
+          <a:prstGeom prst="rect">
+            <a:avLst/>
+          </a:prstGeom>
+        </p:spPr>
+      </p:pic>
+      <p:pic>
+        <p:nvPicPr>
+          <p:cNvPr id="7" name="Graphic 6" descr="Klep open met effen opvulling">
+            <a:extLst>
+              <a:ext uri="{FF2B5EF4-FFF2-40B4-BE49-F238E27FC236}">
+                <a16:creationId xmlns:a16="http://schemas.microsoft.com/office/drawing/2014/main" id="{394F891C-4958-5F7C-ABBE-99508366C1E7}"/>
+              </a:ext>
+            </a:extLst>
+          </p:cNvPr>
+          <p:cNvPicPr>
+            <a:picLocks noChangeAspect="1"/>
+          </p:cNvPicPr>
+          <p:nvPr/>
+        </p:nvPicPr>
+        <p:blipFill>
+          <a:blip r:embed="rId4">
+            <a:extLst>
+              <a:ext uri="{96DAC541-7B7A-43D3-8B79-37D633B846F1}">
+                <asvg:svgBlip xmlns:asvg="http://schemas.microsoft.com/office/drawing/2016/SVG/main" r:embed="rId5"/>
+              </a:ext>
+            </a:extLst>
+          </a:blip>
+          <a:stretch>
+            <a:fillRect/>
+          </a:stretch>
+        </p:blipFill>
+        <p:spPr>
+          <a:xfrm>
+            <a:off x="11085850" y="4729397"/>
+            <a:ext cx="1307892" cy="1307892"/>
+          </a:xfrm>
+          <a:prstGeom prst="rect">
+            <a:avLst/>
+          </a:prstGeom>
+        </p:spPr>
+      </p:pic>
+    </p:spTree>
+    <p:extLst>
+      <p:ext uri="{BB962C8B-B14F-4D97-AF65-F5344CB8AC3E}">
+        <p14:creationId xmlns:p14="http://schemas.microsoft.com/office/powerpoint/2010/main" val="3502173374"/>
+      </p:ext>
+    </p:extLst>
+  </p:cSld>
+  <p:clrMapOvr>
+    <a:masterClrMapping/>
+  </p:clrMapOvr>
+</p:sld>
+</file>
+
+<file path=ppt/slides/slide6.xml><?xml version="1.0" encoding="utf-8"?>
+<p:sld xmlns:a="http://schemas.openxmlformats.org/drawingml/2006/main" xmlns:r="http://schemas.openxmlformats.org/officeDocument/2006/relationships" xmlns:p="http://schemas.openxmlformats.org/presentationml/2006/main">
+  <p:cSld>
+    <p:spTree>
+      <p:nvGrpSpPr>
+        <p:cNvPr id="1" name=""/>
+        <p:cNvGrpSpPr/>
+        <p:nvPr/>
+      </p:nvGrpSpPr>
+      <p:grpSpPr>
+        <a:xfrm>
+          <a:off x="0" y="0"/>
+          <a:ext cx="0" cy="0"/>
+          <a:chOff x="0" y="0"/>
+          <a:chExt cx="0" cy="0"/>
+        </a:xfrm>
+      </p:grpSpPr>
+      <p:sp>
+        <p:nvSpPr>
+          <p:cNvPr id="2" name="Titel 1">
+            <a:extLst>
+              <a:ext uri="{FF2B5EF4-FFF2-40B4-BE49-F238E27FC236}">
+                <a16:creationId xmlns:a16="http://schemas.microsoft.com/office/drawing/2014/main" id="{F1607051-0F3C-18D1-A04F-F432EA764878}"/>
+              </a:ext>
+            </a:extLst>
+          </p:cNvPr>
+          <p:cNvSpPr>
+            <a:spLocks noGrp="1"/>
+          </p:cNvSpPr>
+          <p:nvPr>
+            <p:ph type="title"/>
+          </p:nvPr>
+        </p:nvSpPr>
+        <p:spPr/>
+        <p:txBody>
+          <a:bodyPr/>
+          <a:lstStyle/>
+          <a:p>
+            <a:r>
+              <a:rPr lang="nl-NL"/>
+              <a:t>Netwerk aanvallen</a:t>
+            </a:r>
+          </a:p>
+        </p:txBody>
+      </p:sp>
+      <p:sp>
+        <p:nvSpPr>
+          <p:cNvPr id="3" name="Tijdelijke aanduiding voor inhoud 2">
+            <a:extLst>
+              <a:ext uri="{FF2B5EF4-FFF2-40B4-BE49-F238E27FC236}">
+                <a16:creationId xmlns:a16="http://schemas.microsoft.com/office/drawing/2014/main" id="{E65DC7E6-20F3-149A-4BB4-6A7FD62524AE}"/>
+              </a:ext>
+            </a:extLst>
+          </p:cNvPr>
+          <p:cNvSpPr>
+            <a:spLocks noGrp="1"/>
+          </p:cNvSpPr>
+          <p:nvPr>
+            <p:ph idx="1"/>
+          </p:nvPr>
+        </p:nvSpPr>
+        <p:spPr/>
+        <p:txBody>
+          <a:bodyPr>
+            <a:normAutofit/>
+          </a:bodyPr>
+          <a:lstStyle/>
+          <a:p>
+            <a:r>
+              <a:rPr lang="nl-NL" dirty="0"/>
+              <a:t>Onderzoekende aanvallen</a:t>
+            </a:r>
+          </a:p>
+          <a:p>
+            <a:pPr lvl="1"/>
+            <a:r>
+              <a:rPr lang="nl-NL" dirty="0"/>
+              <a:t>Ping/port </a:t>
+            </a:r>
+            <a:r>
+              <a:rPr lang="nl-NL" dirty="0" err="1"/>
+              <a:t>sweeping</a:t>
+            </a:r>
+            <a:endParaRPr lang="nl-NL" dirty="0"/>
+          </a:p>
+          <a:p>
+            <a:pPr lvl="2"/>
+            <a:r>
+              <a:rPr lang="nl-NL" dirty="0"/>
+              <a:t>Welke apparaten/ poorten staan open om toegang te verlenen op een netwerk en hoe kan je die benutten om vervolgens verder in het systeem te komen.</a:t>
+            </a:r>
+          </a:p>
+          <a:p>
+            <a:r>
+              <a:rPr lang="nl-NL" dirty="0"/>
+              <a:t>Afluisterende aanvallen</a:t>
+            </a:r>
+          </a:p>
+          <a:p>
+            <a:pPr lvl="1"/>
+            <a:r>
+              <a:rPr lang="nl-NL" dirty="0"/>
+              <a:t>IP </a:t>
+            </a:r>
+            <a:r>
+              <a:rPr lang="nl-NL" dirty="0" err="1"/>
+              <a:t>spoofing</a:t>
+            </a:r>
+            <a:endParaRPr lang="nl-NL" dirty="0"/>
+          </a:p>
+          <a:p>
+            <a:pPr lvl="2"/>
+            <a:r>
+              <a:rPr lang="nl-NL" dirty="0"/>
+              <a:t>Slechte netwerken controleren niet of er een dubbel IP adres actief is op het netwerk. Beide krijgen een kopie van al hun binnenkomende berichten.</a:t>
+            </a:r>
+          </a:p>
+        </p:txBody>
+      </p:sp>
+      <p:pic>
+        <p:nvPicPr>
+          <p:cNvPr id="5" name="Graphic 4" descr="Vergrootglas met effen opvulling">
+            <a:extLst>
+              <a:ext uri="{FF2B5EF4-FFF2-40B4-BE49-F238E27FC236}">
+                <a16:creationId xmlns:a16="http://schemas.microsoft.com/office/drawing/2014/main" id="{AB4A0A85-D6C4-DD81-CD96-9C714D763D62}"/>
+              </a:ext>
+            </a:extLst>
+          </p:cNvPr>
+          <p:cNvPicPr>
+            <a:picLocks noChangeAspect="1"/>
+          </p:cNvPicPr>
+          <p:nvPr/>
+        </p:nvPicPr>
+        <p:blipFill>
+          <a:blip r:embed="rId2">
+            <a:extLst>
+              <a:ext uri="{96DAC541-7B7A-43D3-8B79-37D633B846F1}">
+                <asvg:svgBlip xmlns:asvg="http://schemas.microsoft.com/office/drawing/2016/SVG/main" r:embed="rId3"/>
+              </a:ext>
+            </a:extLst>
+          </a:blip>
+          <a:stretch>
+            <a:fillRect/>
+          </a:stretch>
+        </p:blipFill>
+        <p:spPr>
+          <a:xfrm>
+            <a:off x="6178446" y="365125"/>
+            <a:ext cx="1661410" cy="1661410"/>
+          </a:xfrm>
+          <a:prstGeom prst="rect">
+            <a:avLst/>
+          </a:prstGeom>
+        </p:spPr>
+      </p:pic>
+      <p:pic>
+        <p:nvPicPr>
+          <p:cNvPr id="7" name="Graphic 6" descr="Oor met effen opvulling">
+            <a:extLst>
+              <a:ext uri="{FF2B5EF4-FFF2-40B4-BE49-F238E27FC236}">
+                <a16:creationId xmlns:a16="http://schemas.microsoft.com/office/drawing/2014/main" id="{FB76A6A6-A8B4-26B8-999D-580E994A1FAC}"/>
+              </a:ext>
+            </a:extLst>
+          </p:cNvPr>
+          <p:cNvPicPr>
+            <a:picLocks noChangeAspect="1"/>
+          </p:cNvPicPr>
+          <p:nvPr/>
+        </p:nvPicPr>
+        <p:blipFill>
+          <a:blip r:embed="rId4">
+            <a:extLst>
+              <a:ext uri="{96DAC541-7B7A-43D3-8B79-37D633B846F1}">
+                <asvg:svgBlip xmlns:asvg="http://schemas.microsoft.com/office/drawing/2016/SVG/main" r:embed="rId5"/>
+              </a:ext>
+            </a:extLst>
+          </a:blip>
+          <a:stretch>
+            <a:fillRect/>
+          </a:stretch>
+        </p:blipFill>
+        <p:spPr>
+          <a:xfrm>
+            <a:off x="10338314" y="4507441"/>
+            <a:ext cx="1325563" cy="1325563"/>
+          </a:xfrm>
+          <a:prstGeom prst="rect">
+            <a:avLst/>
+          </a:prstGeom>
+        </p:spPr>
+      </p:pic>
+    </p:spTree>
+    <p:extLst>
+      <p:ext uri="{BB962C8B-B14F-4D97-AF65-F5344CB8AC3E}">
+        <p14:creationId xmlns:p14="http://schemas.microsoft.com/office/powerpoint/2010/main" val="4073276283"/>
+      </p:ext>
+    </p:extLst>
+  </p:cSld>
+  <p:clrMapOvr>
+    <a:masterClrMapping/>
+  </p:clrMapOvr>
+</p:sld>
+</file>
+
+<file path=ppt/slides/slide7.xml><?xml version="1.0" encoding="utf-8"?>
+<p:sld xmlns:a="http://schemas.openxmlformats.org/drawingml/2006/main" xmlns:r="http://schemas.openxmlformats.org/officeDocument/2006/relationships" xmlns:p="http://schemas.openxmlformats.org/presentationml/2006/main">
+  <p:cSld>
+    <p:spTree>
+      <p:nvGrpSpPr>
+        <p:cNvPr id="1" name=""/>
+        <p:cNvGrpSpPr/>
+        <p:nvPr/>
+      </p:nvGrpSpPr>
+      <p:grpSpPr>
+        <a:xfrm>
+          <a:off x="0" y="0"/>
+          <a:ext cx="0" cy="0"/>
+          <a:chOff x="0" y="0"/>
+          <a:chExt cx="0" cy="0"/>
+        </a:xfrm>
+      </p:grpSpPr>
+      <p:sp>
+        <p:nvSpPr>
+          <p:cNvPr id="2" name="Titel 1">
+            <a:extLst>
+              <a:ext uri="{FF2B5EF4-FFF2-40B4-BE49-F238E27FC236}">
+                <a16:creationId xmlns:a16="http://schemas.microsoft.com/office/drawing/2014/main" id="{5DB2699A-2C07-D10A-E265-468613EBC0EF}"/>
+              </a:ext>
+            </a:extLst>
+          </p:cNvPr>
+          <p:cNvSpPr>
+            <a:spLocks noGrp="1"/>
+          </p:cNvSpPr>
+          <p:nvPr>
+            <p:ph type="title"/>
+          </p:nvPr>
+        </p:nvSpPr>
+        <p:spPr/>
+        <p:txBody>
+          <a:bodyPr/>
+          <a:lstStyle/>
+          <a:p>
+            <a:r>
+              <a:rPr lang="nl-NL" dirty="0"/>
+              <a:t>Netwerk aanvallen</a:t>
+            </a:r>
+          </a:p>
+        </p:txBody>
+      </p:sp>
+      <p:sp>
+        <p:nvSpPr>
+          <p:cNvPr id="3" name="Tijdelijke aanduiding voor inhoud 2">
+            <a:extLst>
+              <a:ext uri="{FF2B5EF4-FFF2-40B4-BE49-F238E27FC236}">
+                <a16:creationId xmlns:a16="http://schemas.microsoft.com/office/drawing/2014/main" id="{EBD0633F-36BA-C132-F28C-B688770650BE}"/>
+              </a:ext>
+            </a:extLst>
+          </p:cNvPr>
+          <p:cNvSpPr>
+            <a:spLocks noGrp="1"/>
+          </p:cNvSpPr>
+          <p:nvPr>
+            <p:ph idx="1"/>
+          </p:nvPr>
+        </p:nvSpPr>
+        <p:spPr/>
+        <p:txBody>
+          <a:bodyPr/>
+          <a:lstStyle/>
+          <a:p>
+            <a:r>
+              <a:rPr lang="nl-NL" dirty="0"/>
+              <a:t>Brekende/manipulerende aanvallen</a:t>
+            </a:r>
+          </a:p>
+          <a:p>
+            <a:pPr lvl="1"/>
+            <a:r>
+              <a:rPr lang="nl-NL" dirty="0"/>
+              <a:t>Buffer overflow aanvallen</a:t>
+            </a:r>
+          </a:p>
+          <a:p>
+            <a:pPr lvl="2"/>
+            <a:r>
+              <a:rPr lang="nl-NL" dirty="0"/>
+              <a:t>Gebruik maken van server zwaktes om </a:t>
+            </a:r>
+            <a:r>
+              <a:rPr lang="nl-NL" dirty="0" err="1"/>
+              <a:t>errors</a:t>
+            </a:r>
+            <a:r>
+              <a:rPr lang="nl-NL" dirty="0"/>
+              <a:t> herhaaldelijk te </a:t>
+            </a:r>
+            <a:r>
+              <a:rPr lang="nl-NL" dirty="0" err="1"/>
+              <a:t>creeren</a:t>
+            </a:r>
+            <a:r>
+              <a:rPr lang="nl-NL" dirty="0"/>
+              <a:t> om zo het </a:t>
+            </a:r>
+            <a:r>
+              <a:rPr lang="nl-NL" dirty="0" err="1"/>
+              <a:t>systeem’s</a:t>
+            </a:r>
+            <a:r>
+              <a:rPr lang="nl-NL" dirty="0"/>
+              <a:t> geheugen aan te tasten. Dit zorgt ervoor dat er een gat ontstaat in de code en die kan een hacker vullen met eigen code</a:t>
+            </a:r>
+          </a:p>
+          <a:p>
+            <a:endParaRPr lang="nl-NL" dirty="0"/>
+          </a:p>
+        </p:txBody>
+      </p:sp>
+      <p:pic>
+        <p:nvPicPr>
+          <p:cNvPr id="5" name="Graphic 4" descr="Hammer1 met effen opvulling">
+            <a:extLst>
+              <a:ext uri="{FF2B5EF4-FFF2-40B4-BE49-F238E27FC236}">
+                <a16:creationId xmlns:a16="http://schemas.microsoft.com/office/drawing/2014/main" id="{FEC0A9AF-2F0D-F756-C4C5-0C64F205DD76}"/>
+              </a:ext>
+            </a:extLst>
+          </p:cNvPr>
+          <p:cNvPicPr>
+            <a:picLocks noChangeAspect="1"/>
+          </p:cNvPicPr>
+          <p:nvPr/>
+        </p:nvPicPr>
+        <p:blipFill>
+          <a:blip r:embed="rId2">
+            <a:extLst>
+              <a:ext uri="{96DAC541-7B7A-43D3-8B79-37D633B846F1}">
+                <asvg:svgBlip xmlns:asvg="http://schemas.microsoft.com/office/drawing/2016/SVG/main" r:embed="rId3"/>
+              </a:ext>
+            </a:extLst>
+          </a:blip>
+          <a:stretch>
+            <a:fillRect/>
+          </a:stretch>
+        </p:blipFill>
+        <p:spPr>
+          <a:xfrm>
+            <a:off x="10149590" y="4264701"/>
+            <a:ext cx="2042410" cy="2042410"/>
+          </a:xfrm>
+          <a:prstGeom prst="rect">
+            <a:avLst/>
+          </a:prstGeom>
+        </p:spPr>
+      </p:pic>
+    </p:spTree>
+    <p:extLst>
+      <p:ext uri="{BB962C8B-B14F-4D97-AF65-F5344CB8AC3E}">
+        <p14:creationId xmlns:p14="http://schemas.microsoft.com/office/powerpoint/2010/main" val="879928884"/>
+      </p:ext>
+    </p:extLst>
+  </p:cSld>
+  <p:clrMapOvr>
+    <a:masterClrMapping/>
+  </p:clrMapOvr>
+</p:sld>
+</file>
+
+<file path=ppt/slides/slide8.xml><?xml version="1.0" encoding="utf-8"?>
 <p:sld xmlns:a="http://schemas.openxmlformats.org/drawingml/2006/main" xmlns:r="http://schemas.openxmlformats.org/officeDocument/2006/relationships" xmlns:p="http://schemas.openxmlformats.org/presentationml/2006/main">
   <p:cSld>
     <p:spTree>
@@ -5389,2261 +7486,6 @@
 </p:sld>
 </file>
 
-<file path=ppt/slides/slide11.xml><?xml version="1.0" encoding="utf-8"?>
-<p:sld xmlns:a="http://schemas.openxmlformats.org/drawingml/2006/main" xmlns:r="http://schemas.openxmlformats.org/officeDocument/2006/relationships" xmlns:p="http://schemas.openxmlformats.org/presentationml/2006/main">
-  <p:cSld>
-    <p:spTree>
-      <p:nvGrpSpPr>
-        <p:cNvPr id="1" name=""/>
-        <p:cNvGrpSpPr/>
-        <p:nvPr/>
-      </p:nvGrpSpPr>
-      <p:grpSpPr>
-        <a:xfrm>
-          <a:off x="0" y="0"/>
-          <a:ext cx="0" cy="0"/>
-          <a:chOff x="0" y="0"/>
-          <a:chExt cx="0" cy="0"/>
-        </a:xfrm>
-      </p:grpSpPr>
-      <p:sp>
-        <p:nvSpPr>
-          <p:cNvPr id="2" name="Titel 1">
-            <a:extLst>
-              <a:ext uri="{FF2B5EF4-FFF2-40B4-BE49-F238E27FC236}">
-                <a16:creationId xmlns:a16="http://schemas.microsoft.com/office/drawing/2014/main" id="{4B56AA6D-017F-3573-F044-9D2399B0AE2B}"/>
-              </a:ext>
-            </a:extLst>
-          </p:cNvPr>
-          <p:cNvSpPr>
-            <a:spLocks noGrp="1"/>
-          </p:cNvSpPr>
-          <p:nvPr>
-            <p:ph type="title"/>
-          </p:nvPr>
-        </p:nvSpPr>
-        <p:spPr/>
-        <p:txBody>
-          <a:bodyPr/>
-          <a:lstStyle/>
-          <a:p>
-            <a:r>
-              <a:rPr lang="nl-NL" dirty="0"/>
-              <a:t>Bekende netwerk tactieken en voorbeelden</a:t>
-            </a:r>
-          </a:p>
-        </p:txBody>
-      </p:sp>
-      <p:sp>
-        <p:nvSpPr>
-          <p:cNvPr id="3" name="Tijdelijke aanduiding voor inhoud 2">
-            <a:extLst>
-              <a:ext uri="{FF2B5EF4-FFF2-40B4-BE49-F238E27FC236}">
-                <a16:creationId xmlns:a16="http://schemas.microsoft.com/office/drawing/2014/main" id="{AAF5138A-4388-6D78-9143-191146A67141}"/>
-              </a:ext>
-            </a:extLst>
-          </p:cNvPr>
-          <p:cNvSpPr>
-            <a:spLocks noGrp="1"/>
-          </p:cNvSpPr>
-          <p:nvPr>
-            <p:ph idx="1"/>
-          </p:nvPr>
-        </p:nvSpPr>
-        <p:spPr/>
-        <p:txBody>
-          <a:bodyPr/>
-          <a:lstStyle/>
-          <a:p>
-            <a:r>
-              <a:rPr lang="nl-NL" dirty="0"/>
-              <a:t>De “Wifi in de trein” techniek</a:t>
-            </a:r>
-          </a:p>
-          <a:p>
-            <a:r>
-              <a:rPr lang="nl-NL" dirty="0"/>
-              <a:t>De “Koffieshop” techniek</a:t>
-            </a:r>
-          </a:p>
-          <a:p>
-            <a:r>
-              <a:rPr lang="nl-NL" dirty="0"/>
-              <a:t>Het “IT studentenhuis” fiasco</a:t>
-            </a:r>
-          </a:p>
-          <a:p>
-            <a:endParaRPr lang="nl-NL" dirty="0"/>
-          </a:p>
-          <a:p>
-            <a:endParaRPr lang="nl-NL" dirty="0"/>
-          </a:p>
-          <a:p>
-            <a:r>
-              <a:rPr lang="nl-NL" dirty="0"/>
-              <a:t>Extra: het pride parade schandaal van een groep onderzoekers</a:t>
-            </a:r>
-          </a:p>
-        </p:txBody>
-      </p:sp>
-    </p:spTree>
-    <p:extLst>
-      <p:ext uri="{BB962C8B-B14F-4D97-AF65-F5344CB8AC3E}">
-        <p14:creationId xmlns:p14="http://schemas.microsoft.com/office/powerpoint/2010/main" val="1177706916"/>
-      </p:ext>
-    </p:extLst>
-  </p:cSld>
-  <p:clrMapOvr>
-    <a:masterClrMapping/>
-  </p:clrMapOvr>
-</p:sld>
-</file>
-
-<file path=ppt/slides/slide12.xml><?xml version="1.0" encoding="utf-8"?>
-<p:sld xmlns:a="http://schemas.openxmlformats.org/drawingml/2006/main" xmlns:r="http://schemas.openxmlformats.org/officeDocument/2006/relationships" xmlns:p="http://schemas.openxmlformats.org/presentationml/2006/main">
-  <p:cSld>
-    <p:spTree>
-      <p:nvGrpSpPr>
-        <p:cNvPr id="1" name=""/>
-        <p:cNvGrpSpPr/>
-        <p:nvPr/>
-      </p:nvGrpSpPr>
-      <p:grpSpPr>
-        <a:xfrm>
-          <a:off x="0" y="0"/>
-          <a:ext cx="0" cy="0"/>
-          <a:chOff x="0" y="0"/>
-          <a:chExt cx="0" cy="0"/>
-        </a:xfrm>
-      </p:grpSpPr>
-      <p:sp>
-        <p:nvSpPr>
-          <p:cNvPr id="2" name="Titel 1">
-            <a:extLst>
-              <a:ext uri="{FF2B5EF4-FFF2-40B4-BE49-F238E27FC236}">
-                <a16:creationId xmlns:a16="http://schemas.microsoft.com/office/drawing/2014/main" id="{270D8AC7-F844-E434-22D7-47EB46662A62}"/>
-              </a:ext>
-            </a:extLst>
-          </p:cNvPr>
-          <p:cNvSpPr>
-            <a:spLocks noGrp="1"/>
-          </p:cNvSpPr>
-          <p:nvPr>
-            <p:ph type="title"/>
-          </p:nvPr>
-        </p:nvSpPr>
-        <p:spPr/>
-        <p:txBody>
-          <a:bodyPr/>
-          <a:lstStyle/>
-          <a:p>
-            <a:r>
-              <a:rPr lang="nl-NL" dirty="0"/>
-              <a:t>Netwerk beveiliging - invalshoeken</a:t>
-            </a:r>
-          </a:p>
-        </p:txBody>
-      </p:sp>
-      <p:sp>
-        <p:nvSpPr>
-          <p:cNvPr id="3" name="Tijdelijke aanduiding voor inhoud 2">
-            <a:extLst>
-              <a:ext uri="{FF2B5EF4-FFF2-40B4-BE49-F238E27FC236}">
-                <a16:creationId xmlns:a16="http://schemas.microsoft.com/office/drawing/2014/main" id="{EFA93119-D33B-E206-5C87-0A2420A030FD}"/>
-              </a:ext>
-            </a:extLst>
-          </p:cNvPr>
-          <p:cNvSpPr>
-            <a:spLocks noGrp="1"/>
-          </p:cNvSpPr>
-          <p:nvPr>
-            <p:ph idx="1"/>
-          </p:nvPr>
-        </p:nvSpPr>
-        <p:spPr/>
-        <p:txBody>
-          <a:bodyPr/>
-          <a:lstStyle/>
-          <a:p>
-            <a:r>
-              <a:rPr lang="nl-NL" dirty="0"/>
-              <a:t>Voorkom connectie</a:t>
-            </a:r>
-          </a:p>
-          <a:p>
-            <a:r>
-              <a:rPr lang="nl-NL" dirty="0"/>
-              <a:t>Voorkom toegang</a:t>
-            </a:r>
-          </a:p>
-          <a:p>
-            <a:r>
-              <a:rPr lang="nl-NL" dirty="0"/>
-              <a:t>Voorkom </a:t>
-            </a:r>
-            <a:r>
-              <a:rPr lang="nl-NL" dirty="0" err="1"/>
-              <a:t>ongeauthorizeerde</a:t>
-            </a:r>
-            <a:r>
-              <a:rPr lang="nl-NL" dirty="0"/>
-              <a:t> data</a:t>
-            </a:r>
-          </a:p>
-          <a:p>
-            <a:r>
-              <a:rPr lang="nl-NL" dirty="0"/>
-              <a:t>Voorkom data extractie</a:t>
-            </a:r>
-          </a:p>
-          <a:p>
-            <a:endParaRPr lang="nl-NL" dirty="0"/>
-          </a:p>
-        </p:txBody>
-      </p:sp>
-    </p:spTree>
-    <p:extLst>
-      <p:ext uri="{BB962C8B-B14F-4D97-AF65-F5344CB8AC3E}">
-        <p14:creationId xmlns:p14="http://schemas.microsoft.com/office/powerpoint/2010/main" val="2327852966"/>
-      </p:ext>
-    </p:extLst>
-  </p:cSld>
-  <p:clrMapOvr>
-    <a:masterClrMapping/>
-  </p:clrMapOvr>
-</p:sld>
-</file>
-
-<file path=ppt/slides/slide13.xml><?xml version="1.0" encoding="utf-8"?>
-<p:sld xmlns:a="http://schemas.openxmlformats.org/drawingml/2006/main" xmlns:r="http://schemas.openxmlformats.org/officeDocument/2006/relationships" xmlns:p="http://schemas.openxmlformats.org/presentationml/2006/main">
-  <p:cSld>
-    <p:spTree>
-      <p:nvGrpSpPr>
-        <p:cNvPr id="1" name=""/>
-        <p:cNvGrpSpPr/>
-        <p:nvPr/>
-      </p:nvGrpSpPr>
-      <p:grpSpPr>
-        <a:xfrm>
-          <a:off x="0" y="0"/>
-          <a:ext cx="0" cy="0"/>
-          <a:chOff x="0" y="0"/>
-          <a:chExt cx="0" cy="0"/>
-        </a:xfrm>
-      </p:grpSpPr>
-      <p:sp>
-        <p:nvSpPr>
-          <p:cNvPr id="2" name="Titel 1">
-            <a:extLst>
-              <a:ext uri="{FF2B5EF4-FFF2-40B4-BE49-F238E27FC236}">
-                <a16:creationId xmlns:a16="http://schemas.microsoft.com/office/drawing/2014/main" id="{F01C623F-8EDD-04A0-7256-DD23FAC9E09B}"/>
-              </a:ext>
-            </a:extLst>
-          </p:cNvPr>
-          <p:cNvSpPr>
-            <a:spLocks noGrp="1"/>
-          </p:cNvSpPr>
-          <p:nvPr>
-            <p:ph type="title"/>
-          </p:nvPr>
-        </p:nvSpPr>
-        <p:spPr/>
-        <p:txBody>
-          <a:bodyPr/>
-          <a:lstStyle/>
-          <a:p>
-            <a:r>
-              <a:rPr lang="nl-NL" dirty="0"/>
-              <a:t>Netwerk beveiliging - thuis</a:t>
-            </a:r>
-          </a:p>
-        </p:txBody>
-      </p:sp>
-      <p:sp>
-        <p:nvSpPr>
-          <p:cNvPr id="3" name="Tijdelijke aanduiding voor inhoud 2">
-            <a:extLst>
-              <a:ext uri="{FF2B5EF4-FFF2-40B4-BE49-F238E27FC236}">
-                <a16:creationId xmlns:a16="http://schemas.microsoft.com/office/drawing/2014/main" id="{2C1571CC-0F7B-F2C6-5EF9-0937627231A9}"/>
-              </a:ext>
-            </a:extLst>
-          </p:cNvPr>
-          <p:cNvSpPr>
-            <a:spLocks noGrp="1"/>
-          </p:cNvSpPr>
-          <p:nvPr>
-            <p:ph idx="1"/>
-          </p:nvPr>
-        </p:nvSpPr>
-        <p:spPr/>
-        <p:txBody>
-          <a:bodyPr>
-            <a:normAutofit fontScale="92500" lnSpcReduction="10000"/>
-          </a:bodyPr>
-          <a:lstStyle/>
-          <a:p>
-            <a:r>
-              <a:rPr lang="nl-NL" dirty="0"/>
-              <a:t>WPA3 versleuteling</a:t>
-            </a:r>
-          </a:p>
-          <a:p>
-            <a:r>
-              <a:rPr lang="nl-NL" dirty="0"/>
-              <a:t>Splitsing tussen privé en gast netwerk</a:t>
-            </a:r>
-          </a:p>
-          <a:p>
-            <a:r>
-              <a:rPr lang="nl-NL" dirty="0"/>
-              <a:t>Beveiligd netwerk zonder publieke fysieke aansluiting</a:t>
-            </a:r>
-          </a:p>
-          <a:p>
-            <a:r>
-              <a:rPr lang="nl-NL" dirty="0"/>
-              <a:t>Firewalls</a:t>
-            </a:r>
-          </a:p>
-          <a:p>
-            <a:r>
-              <a:rPr lang="nl-NL" dirty="0"/>
-              <a:t>VPN</a:t>
-            </a:r>
-          </a:p>
-          <a:p>
-            <a:r>
-              <a:rPr lang="nl-NL" dirty="0"/>
-              <a:t>Sterke geheime wachtwoorden, dit blokkeert 70% van de privé dreigingen</a:t>
-            </a:r>
-          </a:p>
-          <a:p>
-            <a:r>
-              <a:rPr lang="nl-NL" dirty="0"/>
-              <a:t>Formeel verzoek tot verwijdering data geschiedenis bij internet provider</a:t>
-            </a:r>
-            <a:br>
-              <a:rPr lang="nl-NL" dirty="0"/>
-            </a:br>
-            <a:r>
-              <a:rPr lang="nl-NL" b="1" dirty="0"/>
-              <a:t>'recht op vergetelheid'</a:t>
-            </a:r>
-            <a:r>
-              <a:rPr lang="nl-NL" dirty="0"/>
-              <a:t> (artikel 17 AVG)</a:t>
-            </a:r>
-          </a:p>
-        </p:txBody>
-      </p:sp>
-    </p:spTree>
-    <p:extLst>
-      <p:ext uri="{BB962C8B-B14F-4D97-AF65-F5344CB8AC3E}">
-        <p14:creationId xmlns:p14="http://schemas.microsoft.com/office/powerpoint/2010/main" val="4079701516"/>
-      </p:ext>
-    </p:extLst>
-  </p:cSld>
-  <p:clrMapOvr>
-    <a:masterClrMapping/>
-  </p:clrMapOvr>
-</p:sld>
-</file>
-
-<file path=ppt/slides/slide14.xml><?xml version="1.0" encoding="utf-8"?>
-<p:sld xmlns:a="http://schemas.openxmlformats.org/drawingml/2006/main" xmlns:r="http://schemas.openxmlformats.org/officeDocument/2006/relationships" xmlns:p="http://schemas.openxmlformats.org/presentationml/2006/main">
-  <p:cSld>
-    <p:spTree>
-      <p:nvGrpSpPr>
-        <p:cNvPr id="1" name=""/>
-        <p:cNvGrpSpPr/>
-        <p:nvPr/>
-      </p:nvGrpSpPr>
-      <p:grpSpPr>
-        <a:xfrm>
-          <a:off x="0" y="0"/>
-          <a:ext cx="0" cy="0"/>
-          <a:chOff x="0" y="0"/>
-          <a:chExt cx="0" cy="0"/>
-        </a:xfrm>
-      </p:grpSpPr>
-      <p:sp>
-        <p:nvSpPr>
-          <p:cNvPr id="2" name="Titel 1">
-            <a:extLst>
-              <a:ext uri="{FF2B5EF4-FFF2-40B4-BE49-F238E27FC236}">
-                <a16:creationId xmlns:a16="http://schemas.microsoft.com/office/drawing/2014/main" id="{50FCEC88-3D46-F402-7693-C4F510DB402F}"/>
-              </a:ext>
-            </a:extLst>
-          </p:cNvPr>
-          <p:cNvSpPr>
-            <a:spLocks noGrp="1"/>
-          </p:cNvSpPr>
-          <p:nvPr>
-            <p:ph type="title"/>
-          </p:nvPr>
-        </p:nvSpPr>
-        <p:spPr/>
-        <p:txBody>
-          <a:bodyPr/>
-          <a:lstStyle/>
-          <a:p>
-            <a:r>
-              <a:rPr lang="nl-NL" dirty="0" err="1"/>
-              <a:t>Spysoftware</a:t>
-            </a:r>
-            <a:endParaRPr lang="nl-NL" dirty="0"/>
-          </a:p>
-        </p:txBody>
-      </p:sp>
-      <p:sp>
-        <p:nvSpPr>
-          <p:cNvPr id="3" name="Tijdelijke aanduiding voor inhoud 2">
-            <a:extLst>
-              <a:ext uri="{FF2B5EF4-FFF2-40B4-BE49-F238E27FC236}">
-                <a16:creationId xmlns:a16="http://schemas.microsoft.com/office/drawing/2014/main" id="{2826A35B-3FEA-46C1-6448-941478EAA77F}"/>
-              </a:ext>
-            </a:extLst>
-          </p:cNvPr>
-          <p:cNvSpPr>
-            <a:spLocks noGrp="1"/>
-          </p:cNvSpPr>
-          <p:nvPr>
-            <p:ph idx="1"/>
-          </p:nvPr>
-        </p:nvSpPr>
-        <p:spPr/>
-        <p:txBody>
-          <a:bodyPr/>
-          <a:lstStyle/>
-          <a:p>
-            <a:r>
-              <a:rPr lang="nl-NL" dirty="0"/>
-              <a:t>Hackers willen om meerdere redenen </a:t>
-            </a:r>
-            <a:r>
-              <a:rPr lang="nl-NL" dirty="0" err="1"/>
-              <a:t>spysoftware</a:t>
-            </a:r>
-            <a:r>
-              <a:rPr lang="nl-NL" dirty="0"/>
-              <a:t> plaatsen</a:t>
-            </a:r>
-          </a:p>
-          <a:p>
-            <a:pPr lvl="1"/>
-            <a:r>
-              <a:rPr lang="nl-NL" dirty="0"/>
-              <a:t>Chantage (blackmail) van personen of bedrijven</a:t>
-            </a:r>
-          </a:p>
-          <a:p>
-            <a:pPr lvl="1"/>
-            <a:r>
-              <a:rPr lang="nl-NL" dirty="0"/>
-              <a:t>Bedrijfsgeheimen</a:t>
-            </a:r>
-          </a:p>
-          <a:p>
-            <a:pPr lvl="1"/>
-            <a:r>
-              <a:rPr lang="nl-NL" dirty="0"/>
-              <a:t>Zwarte markt voor data</a:t>
-            </a:r>
-          </a:p>
-          <a:p>
-            <a:pPr lvl="1"/>
-            <a:r>
-              <a:rPr lang="nl-NL" dirty="0"/>
-              <a:t>Zwaktes ontdekken voor een zwaardere aanval</a:t>
-            </a:r>
-          </a:p>
-          <a:p>
-            <a:endParaRPr lang="nl-NL" dirty="0"/>
-          </a:p>
-          <a:p>
-            <a:r>
-              <a:rPr lang="nl-NL" dirty="0"/>
-              <a:t>Veel van de bekende </a:t>
-            </a:r>
-            <a:r>
-              <a:rPr lang="nl-NL" dirty="0" err="1"/>
-              <a:t>spysoftware</a:t>
-            </a:r>
-            <a:r>
-              <a:rPr lang="nl-NL" dirty="0"/>
-              <a:t> is makkelijk te herkennen</a:t>
-            </a:r>
-          </a:p>
-          <a:p>
-            <a:pPr lvl="1"/>
-            <a:endParaRPr lang="nl-NL" dirty="0"/>
-          </a:p>
-        </p:txBody>
-      </p:sp>
-    </p:spTree>
-    <p:extLst>
-      <p:ext uri="{BB962C8B-B14F-4D97-AF65-F5344CB8AC3E}">
-        <p14:creationId xmlns:p14="http://schemas.microsoft.com/office/powerpoint/2010/main" val="1756895851"/>
-      </p:ext>
-    </p:extLst>
-  </p:cSld>
-  <p:clrMapOvr>
-    <a:masterClrMapping/>
-  </p:clrMapOvr>
-</p:sld>
-</file>
-
-<file path=ppt/slides/slide15.xml><?xml version="1.0" encoding="utf-8"?>
-<p:sld xmlns:a="http://schemas.openxmlformats.org/drawingml/2006/main" xmlns:r="http://schemas.openxmlformats.org/officeDocument/2006/relationships" xmlns:p="http://schemas.openxmlformats.org/presentationml/2006/main">
-  <p:cSld>
-    <p:spTree>
-      <p:nvGrpSpPr>
-        <p:cNvPr id="1" name=""/>
-        <p:cNvGrpSpPr/>
-        <p:nvPr/>
-      </p:nvGrpSpPr>
-      <p:grpSpPr>
-        <a:xfrm>
-          <a:off x="0" y="0"/>
-          <a:ext cx="0" cy="0"/>
-          <a:chOff x="0" y="0"/>
-          <a:chExt cx="0" cy="0"/>
-        </a:xfrm>
-      </p:grpSpPr>
-      <p:sp>
-        <p:nvSpPr>
-          <p:cNvPr id="2" name="Titel 1">
-            <a:extLst>
-              <a:ext uri="{FF2B5EF4-FFF2-40B4-BE49-F238E27FC236}">
-                <a16:creationId xmlns:a16="http://schemas.microsoft.com/office/drawing/2014/main" id="{FC180BEB-6337-DB82-046D-18E845496FDB}"/>
-              </a:ext>
-            </a:extLst>
-          </p:cNvPr>
-          <p:cNvSpPr>
-            <a:spLocks noGrp="1"/>
-          </p:cNvSpPr>
-          <p:nvPr>
-            <p:ph type="title"/>
-          </p:nvPr>
-        </p:nvSpPr>
-        <p:spPr/>
-        <p:txBody>
-          <a:bodyPr/>
-          <a:lstStyle/>
-          <a:p>
-            <a:r>
-              <a:rPr lang="nl-NL" dirty="0" err="1"/>
-              <a:t>Spysoftware</a:t>
-            </a:r>
-            <a:endParaRPr lang="nl-NL" dirty="0"/>
-          </a:p>
-        </p:txBody>
-      </p:sp>
-      <p:sp>
-        <p:nvSpPr>
-          <p:cNvPr id="3" name="Tijdelijke aanduiding voor inhoud 2">
-            <a:extLst>
-              <a:ext uri="{FF2B5EF4-FFF2-40B4-BE49-F238E27FC236}">
-                <a16:creationId xmlns:a16="http://schemas.microsoft.com/office/drawing/2014/main" id="{6F34CD11-D667-7F30-83A9-740342E96730}"/>
-              </a:ext>
-            </a:extLst>
-          </p:cNvPr>
-          <p:cNvSpPr>
-            <a:spLocks noGrp="1"/>
-          </p:cNvSpPr>
-          <p:nvPr>
-            <p:ph idx="1"/>
-          </p:nvPr>
-        </p:nvSpPr>
-        <p:spPr/>
-        <p:txBody>
-          <a:bodyPr/>
-          <a:lstStyle/>
-          <a:p>
-            <a:r>
-              <a:rPr lang="nl-NL" dirty="0" err="1"/>
-              <a:t>Syptomen</a:t>
-            </a:r>
-            <a:r>
-              <a:rPr lang="nl-NL" dirty="0"/>
-              <a:t> van </a:t>
-            </a:r>
-            <a:r>
-              <a:rPr lang="nl-NL" dirty="0" err="1"/>
-              <a:t>spysoftware</a:t>
-            </a:r>
-            <a:r>
-              <a:rPr lang="nl-NL" dirty="0"/>
-              <a:t>:</a:t>
-            </a:r>
-          </a:p>
-          <a:p>
-            <a:pPr lvl="1"/>
-            <a:r>
-              <a:rPr lang="nl-NL" dirty="0"/>
-              <a:t>Camera’s die aan en uit gaan van apparaten zonder reden</a:t>
-            </a:r>
-          </a:p>
-          <a:p>
-            <a:pPr lvl="1"/>
-            <a:r>
-              <a:rPr lang="nl-NL" dirty="0"/>
-              <a:t>Je computer is ineens verlangzaamd zonder reden</a:t>
-            </a:r>
-          </a:p>
-          <a:p>
-            <a:pPr lvl="1"/>
-            <a:r>
-              <a:rPr lang="nl-NL" dirty="0"/>
-              <a:t>Je computer wordt veel warmer zonder reden</a:t>
-            </a:r>
-          </a:p>
-          <a:p>
-            <a:pPr lvl="1"/>
-            <a:r>
-              <a:rPr lang="nl-NL" dirty="0"/>
-              <a:t>Je muis beweegt zonder dat er input is (Dit is ook control software)</a:t>
-            </a:r>
-          </a:p>
-          <a:p>
-            <a:pPr lvl="1"/>
-            <a:r>
-              <a:rPr lang="nl-NL" dirty="0"/>
-              <a:t>Je computer gaat van </a:t>
-            </a:r>
-            <a:r>
-              <a:rPr lang="nl-NL" dirty="0" err="1"/>
-              <a:t>standby</a:t>
-            </a:r>
-            <a:r>
-              <a:rPr lang="nl-NL" dirty="0"/>
-              <a:t> ineens aan zonder reden.</a:t>
-            </a:r>
-          </a:p>
-          <a:p>
-            <a:pPr lvl="1"/>
-            <a:endParaRPr lang="nl-NL" dirty="0"/>
-          </a:p>
-          <a:p>
-            <a:pPr lvl="1"/>
-            <a:endParaRPr lang="nl-NL" dirty="0"/>
-          </a:p>
-        </p:txBody>
-      </p:sp>
-    </p:spTree>
-    <p:extLst>
-      <p:ext uri="{BB962C8B-B14F-4D97-AF65-F5344CB8AC3E}">
-        <p14:creationId xmlns:p14="http://schemas.microsoft.com/office/powerpoint/2010/main" val="3190865094"/>
-      </p:ext>
-    </p:extLst>
-  </p:cSld>
-  <p:clrMapOvr>
-    <a:masterClrMapping/>
-  </p:clrMapOvr>
-</p:sld>
-</file>
-
-<file path=ppt/slides/slide16.xml><?xml version="1.0" encoding="utf-8"?>
-<p:sld xmlns:a="http://schemas.openxmlformats.org/drawingml/2006/main" xmlns:r="http://schemas.openxmlformats.org/officeDocument/2006/relationships" xmlns:p="http://schemas.openxmlformats.org/presentationml/2006/main">
-  <p:cSld>
-    <p:spTree>
-      <p:nvGrpSpPr>
-        <p:cNvPr id="1" name=""/>
-        <p:cNvGrpSpPr/>
-        <p:nvPr/>
-      </p:nvGrpSpPr>
-      <p:grpSpPr>
-        <a:xfrm>
-          <a:off x="0" y="0"/>
-          <a:ext cx="0" cy="0"/>
-          <a:chOff x="0" y="0"/>
-          <a:chExt cx="0" cy="0"/>
-        </a:xfrm>
-      </p:grpSpPr>
-      <p:sp>
-        <p:nvSpPr>
-          <p:cNvPr id="2" name="Titel 1">
-            <a:extLst>
-              <a:ext uri="{FF2B5EF4-FFF2-40B4-BE49-F238E27FC236}">
-                <a16:creationId xmlns:a16="http://schemas.microsoft.com/office/drawing/2014/main" id="{773B23E2-D110-25B3-CDF2-318AF570F8F3}"/>
-              </a:ext>
-            </a:extLst>
-          </p:cNvPr>
-          <p:cNvSpPr>
-            <a:spLocks noGrp="1"/>
-          </p:cNvSpPr>
-          <p:nvPr>
-            <p:ph type="title"/>
-          </p:nvPr>
-        </p:nvSpPr>
-        <p:spPr/>
-        <p:txBody>
-          <a:bodyPr/>
-          <a:lstStyle/>
-          <a:p>
-            <a:r>
-              <a:rPr lang="nl-NL" dirty="0" err="1"/>
-              <a:t>Spysoftware</a:t>
-            </a:r>
-            <a:r>
-              <a:rPr lang="nl-NL" dirty="0"/>
-              <a:t> - beveiliging</a:t>
-            </a:r>
-          </a:p>
-        </p:txBody>
-      </p:sp>
-      <p:sp>
-        <p:nvSpPr>
-          <p:cNvPr id="3" name="Tijdelijke aanduiding voor inhoud 2">
-            <a:extLst>
-              <a:ext uri="{FF2B5EF4-FFF2-40B4-BE49-F238E27FC236}">
-                <a16:creationId xmlns:a16="http://schemas.microsoft.com/office/drawing/2014/main" id="{2F46C0FB-42C0-08FD-6952-23E08F85CB92}"/>
-              </a:ext>
-            </a:extLst>
-          </p:cNvPr>
-          <p:cNvSpPr>
-            <a:spLocks noGrp="1"/>
-          </p:cNvSpPr>
-          <p:nvPr>
-            <p:ph idx="1"/>
-          </p:nvPr>
-        </p:nvSpPr>
-        <p:spPr/>
-        <p:txBody>
-          <a:bodyPr/>
-          <a:lstStyle/>
-          <a:p>
-            <a:r>
-              <a:rPr lang="nl-NL" dirty="0"/>
-              <a:t>Meeste </a:t>
-            </a:r>
-            <a:r>
-              <a:rPr lang="nl-NL" dirty="0" err="1"/>
-              <a:t>spysoftware</a:t>
-            </a:r>
-            <a:r>
-              <a:rPr lang="nl-NL" dirty="0"/>
-              <a:t> is te vinden via de standaard beveiliging</a:t>
-            </a:r>
-          </a:p>
-          <a:p>
-            <a:r>
-              <a:rPr lang="nl-NL" dirty="0" err="1"/>
-              <a:t>Mcafee</a:t>
-            </a:r>
-            <a:r>
-              <a:rPr lang="nl-NL" dirty="0"/>
-              <a:t> en AVG zijn iets beter maar deels betaald</a:t>
-            </a:r>
-          </a:p>
-          <a:p>
-            <a:endParaRPr lang="nl-NL" dirty="0"/>
-          </a:p>
-          <a:p>
-            <a:r>
-              <a:rPr lang="nl-NL" dirty="0"/>
-              <a:t>Open geen files waarvan je niet weet waar en van wie ze vandaan komen. Een </a:t>
-            </a:r>
-            <a:r>
-              <a:rPr lang="nl-NL" dirty="0" err="1"/>
-              <a:t>spysoftware</a:t>
-            </a:r>
-            <a:r>
-              <a:rPr lang="nl-NL" dirty="0"/>
-              <a:t> kan al in een afbeelding verstopt zitten. </a:t>
-            </a:r>
-          </a:p>
-          <a:p>
-            <a:r>
-              <a:rPr lang="nl-NL" dirty="0"/>
-              <a:t>Klik niet op links van vreemde bronnen of advertenties die te mooi klinken.</a:t>
-            </a:r>
-          </a:p>
-          <a:p>
-            <a:r>
-              <a:rPr lang="nl-NL" dirty="0"/>
-              <a:t>Voorkom inloggen op publieke netwerken</a:t>
-            </a:r>
-          </a:p>
-          <a:p>
-            <a:endParaRPr lang="nl-NL" dirty="0"/>
-          </a:p>
-        </p:txBody>
-      </p:sp>
-    </p:spTree>
-    <p:extLst>
-      <p:ext uri="{BB962C8B-B14F-4D97-AF65-F5344CB8AC3E}">
-        <p14:creationId xmlns:p14="http://schemas.microsoft.com/office/powerpoint/2010/main" val="3167232495"/>
-      </p:ext>
-    </p:extLst>
-  </p:cSld>
-  <p:clrMapOvr>
-    <a:masterClrMapping/>
-  </p:clrMapOvr>
-</p:sld>
-</file>
-
-<file path=ppt/slides/slide17.xml><?xml version="1.0" encoding="utf-8"?>
-<p:sld xmlns:a="http://schemas.openxmlformats.org/drawingml/2006/main" xmlns:r="http://schemas.openxmlformats.org/officeDocument/2006/relationships" xmlns:p="http://schemas.openxmlformats.org/presentationml/2006/main">
-  <p:cSld>
-    <p:spTree>
-      <p:nvGrpSpPr>
-        <p:cNvPr id="1" name=""/>
-        <p:cNvGrpSpPr/>
-        <p:nvPr/>
-      </p:nvGrpSpPr>
-      <p:grpSpPr>
-        <a:xfrm>
-          <a:off x="0" y="0"/>
-          <a:ext cx="0" cy="0"/>
-          <a:chOff x="0" y="0"/>
-          <a:chExt cx="0" cy="0"/>
-        </a:xfrm>
-      </p:grpSpPr>
-      <p:sp>
-        <p:nvSpPr>
-          <p:cNvPr id="2" name="Titel 1">
-            <a:extLst>
-              <a:ext uri="{FF2B5EF4-FFF2-40B4-BE49-F238E27FC236}">
-                <a16:creationId xmlns:a16="http://schemas.microsoft.com/office/drawing/2014/main" id="{AA9D8D61-0B66-4C27-EF35-7FD222DE7F05}"/>
-              </a:ext>
-            </a:extLst>
-          </p:cNvPr>
-          <p:cNvSpPr>
-            <a:spLocks noGrp="1"/>
-          </p:cNvSpPr>
-          <p:nvPr>
-            <p:ph type="title"/>
-          </p:nvPr>
-        </p:nvSpPr>
-        <p:spPr/>
-        <p:txBody>
-          <a:bodyPr/>
-          <a:lstStyle/>
-          <a:p>
-            <a:r>
-              <a:rPr lang="nl-NL" dirty="0" err="1"/>
-              <a:t>Wireshark</a:t>
-            </a:r>
-            <a:endParaRPr lang="nl-NL" dirty="0"/>
-          </a:p>
-        </p:txBody>
-      </p:sp>
-      <p:sp>
-        <p:nvSpPr>
-          <p:cNvPr id="3" name="Tijdelijke aanduiding voor inhoud 2">
-            <a:extLst>
-              <a:ext uri="{FF2B5EF4-FFF2-40B4-BE49-F238E27FC236}">
-                <a16:creationId xmlns:a16="http://schemas.microsoft.com/office/drawing/2014/main" id="{73D65B2C-0B29-6837-1A38-EBF4B3F9DA5A}"/>
-              </a:ext>
-            </a:extLst>
-          </p:cNvPr>
-          <p:cNvSpPr>
-            <a:spLocks noGrp="1"/>
-          </p:cNvSpPr>
-          <p:nvPr>
-            <p:ph idx="1"/>
-          </p:nvPr>
-        </p:nvSpPr>
-        <p:spPr/>
-        <p:txBody>
-          <a:bodyPr/>
-          <a:lstStyle/>
-          <a:p>
-            <a:r>
-              <a:rPr lang="nl-NL" dirty="0" err="1"/>
-              <a:t>Wireshark</a:t>
-            </a:r>
-            <a:r>
-              <a:rPr lang="nl-NL" dirty="0"/>
-              <a:t> is een soort afluister programma dat in een grijs gebied valt.</a:t>
-            </a:r>
-          </a:p>
-          <a:p>
-            <a:r>
-              <a:rPr lang="nl-NL" dirty="0"/>
-              <a:t>Er is een opdracht beschikbaar voor maar die is </a:t>
-            </a:r>
-            <a:r>
-              <a:rPr lang="nl-NL" b="1" dirty="0">
-                <a:solidFill>
-                  <a:srgbClr val="FF0000"/>
-                </a:solidFill>
-              </a:rPr>
-              <a:t>NIET</a:t>
-            </a:r>
-            <a:r>
-              <a:rPr lang="nl-NL" dirty="0"/>
-              <a:t> verplicht.</a:t>
-            </a:r>
-          </a:p>
-          <a:p>
-            <a:r>
-              <a:rPr lang="nl-NL" b="1" dirty="0">
-                <a:solidFill>
-                  <a:srgbClr val="FF0000"/>
-                </a:solidFill>
-              </a:rPr>
-              <a:t>BELANGRIJK</a:t>
-            </a:r>
-            <a:r>
-              <a:rPr lang="nl-NL" dirty="0"/>
-              <a:t>: DOE dit </a:t>
-            </a:r>
-            <a:r>
-              <a:rPr lang="nl-NL" b="1" dirty="0">
-                <a:solidFill>
-                  <a:srgbClr val="FF0000"/>
-                </a:solidFill>
-              </a:rPr>
-              <a:t>NIET</a:t>
-            </a:r>
-            <a:r>
-              <a:rPr lang="nl-NL" dirty="0"/>
-              <a:t> op het </a:t>
-            </a:r>
-            <a:r>
-              <a:rPr lang="nl-NL" dirty="0" err="1"/>
-              <a:t>eduroam</a:t>
-            </a:r>
-            <a:r>
-              <a:rPr lang="nl-NL" dirty="0"/>
-              <a:t> netwerk maar op het ICT netwerk. Je IP wordt anders </a:t>
-            </a:r>
-            <a:r>
-              <a:rPr lang="nl-NL" b="1" dirty="0">
-                <a:solidFill>
-                  <a:srgbClr val="FF0000"/>
-                </a:solidFill>
-              </a:rPr>
-              <a:t>geblokkeerd. </a:t>
-            </a:r>
-          </a:p>
-        </p:txBody>
-      </p:sp>
-      <p:pic>
-        <p:nvPicPr>
-          <p:cNvPr id="1026" name="Picture 2" descr="Wireshark - Free Icon PNG, SVG">
-            <a:extLst>
-              <a:ext uri="{FF2B5EF4-FFF2-40B4-BE49-F238E27FC236}">
-                <a16:creationId xmlns:a16="http://schemas.microsoft.com/office/drawing/2014/main" id="{6DC348A4-C0E4-739B-43B6-89DBF7F1C8C8}"/>
-              </a:ext>
-            </a:extLst>
-          </p:cNvPr>
-          <p:cNvPicPr>
-            <a:picLocks noChangeAspect="1" noChangeArrowheads="1"/>
-          </p:cNvPicPr>
-          <p:nvPr/>
-        </p:nvPicPr>
-        <p:blipFill>
-          <a:blip r:embed="rId2">
-            <a:extLst>
-              <a:ext uri="{28A0092B-C50C-407E-A947-70E740481C1C}">
-                <a14:useLocalDpi xmlns:a14="http://schemas.microsoft.com/office/drawing/2010/main" val="0"/>
-              </a:ext>
-            </a:extLst>
-          </a:blip>
-          <a:srcRect/>
-          <a:stretch>
-            <a:fillRect/>
-          </a:stretch>
-        </p:blipFill>
-        <p:spPr bwMode="auto">
-          <a:xfrm>
-            <a:off x="9938478" y="122250"/>
-            <a:ext cx="1811311" cy="1811311"/>
-          </a:xfrm>
-          <a:prstGeom prst="rect">
-            <a:avLst/>
-          </a:prstGeom>
-          <a:noFill/>
-          <a:extLst>
-            <a:ext uri="{909E8E84-426E-40DD-AFC4-6F175D3DCCD1}">
-              <a14:hiddenFill xmlns:a14="http://schemas.microsoft.com/office/drawing/2010/main">
-                <a:solidFill>
-                  <a:srgbClr val="FFFFFF"/>
-                </a:solidFill>
-              </a14:hiddenFill>
-            </a:ext>
-          </a:extLst>
-        </p:spPr>
-      </p:pic>
-    </p:spTree>
-    <p:extLst>
-      <p:ext uri="{BB962C8B-B14F-4D97-AF65-F5344CB8AC3E}">
-        <p14:creationId xmlns:p14="http://schemas.microsoft.com/office/powerpoint/2010/main" val="2464847785"/>
-      </p:ext>
-    </p:extLst>
-  </p:cSld>
-  <p:clrMapOvr>
-    <a:masterClrMapping/>
-  </p:clrMapOvr>
-</p:sld>
-</file>
-
-<file path=ppt/slides/slide18.xml><?xml version="1.0" encoding="utf-8"?>
-<p:sld xmlns:a="http://schemas.openxmlformats.org/drawingml/2006/main" xmlns:r="http://schemas.openxmlformats.org/officeDocument/2006/relationships" xmlns:p="http://schemas.openxmlformats.org/presentationml/2006/main">
-  <p:cSld>
-    <p:spTree>
-      <p:nvGrpSpPr>
-        <p:cNvPr id="1" name=""/>
-        <p:cNvGrpSpPr/>
-        <p:nvPr/>
-      </p:nvGrpSpPr>
-      <p:grpSpPr>
-        <a:xfrm>
-          <a:off x="0" y="0"/>
-          <a:ext cx="0" cy="0"/>
-          <a:chOff x="0" y="0"/>
-          <a:chExt cx="0" cy="0"/>
-        </a:xfrm>
-      </p:grpSpPr>
-      <p:sp>
-        <p:nvSpPr>
-          <p:cNvPr id="2" name="Titel 1">
-            <a:extLst>
-              <a:ext uri="{FF2B5EF4-FFF2-40B4-BE49-F238E27FC236}">
-                <a16:creationId xmlns:a16="http://schemas.microsoft.com/office/drawing/2014/main" id="{B11A3F00-D22C-8C45-2591-74E8FD01CE37}"/>
-              </a:ext>
-            </a:extLst>
-          </p:cNvPr>
-          <p:cNvSpPr>
-            <a:spLocks noGrp="1"/>
-          </p:cNvSpPr>
-          <p:nvPr>
-            <p:ph type="title"/>
-          </p:nvPr>
-        </p:nvSpPr>
-        <p:spPr/>
-        <p:txBody>
-          <a:bodyPr/>
-          <a:lstStyle/>
-          <a:p>
-            <a:r>
-              <a:rPr lang="nl-NL" dirty="0"/>
-              <a:t>Volgende week</a:t>
-            </a:r>
-          </a:p>
-        </p:txBody>
-      </p:sp>
-      <p:sp>
-        <p:nvSpPr>
-          <p:cNvPr id="3" name="Tijdelijke aanduiding voor inhoud 2">
-            <a:extLst>
-              <a:ext uri="{FF2B5EF4-FFF2-40B4-BE49-F238E27FC236}">
-                <a16:creationId xmlns:a16="http://schemas.microsoft.com/office/drawing/2014/main" id="{A186008C-654E-6F3B-AA1A-BDA418F9A75C}"/>
-              </a:ext>
-            </a:extLst>
-          </p:cNvPr>
-          <p:cNvSpPr>
-            <a:spLocks noGrp="1"/>
-          </p:cNvSpPr>
-          <p:nvPr>
-            <p:ph idx="1"/>
-          </p:nvPr>
-        </p:nvSpPr>
-        <p:spPr/>
-        <p:txBody>
-          <a:bodyPr/>
-          <a:lstStyle/>
-          <a:p>
-            <a:r>
-              <a:rPr lang="nl-NL" dirty="0"/>
-              <a:t>Wetgeving deel 2</a:t>
-            </a:r>
-          </a:p>
-          <a:p>
-            <a:pPr lvl="1"/>
-            <a:r>
-              <a:rPr lang="nl-NL" dirty="0"/>
-              <a:t>Nederlandse cyber wetgeving</a:t>
-            </a:r>
-          </a:p>
-          <a:p>
-            <a:pPr lvl="1"/>
-            <a:r>
-              <a:rPr lang="nl-NL" dirty="0"/>
-              <a:t>Amerikaanse cyber wetgeving</a:t>
-            </a:r>
-          </a:p>
-          <a:p>
-            <a:pPr lvl="1"/>
-            <a:r>
-              <a:rPr lang="nl-NL" dirty="0" err="1"/>
-              <a:t>Chineese</a:t>
-            </a:r>
-            <a:r>
-              <a:rPr lang="nl-NL" dirty="0"/>
-              <a:t> cyber wetgeving</a:t>
-            </a:r>
-          </a:p>
-          <a:p>
-            <a:r>
-              <a:rPr lang="nl-NL" dirty="0"/>
-              <a:t>Contracten en NDA</a:t>
-            </a:r>
-          </a:p>
-        </p:txBody>
-      </p:sp>
-    </p:spTree>
-    <p:extLst>
-      <p:ext uri="{BB962C8B-B14F-4D97-AF65-F5344CB8AC3E}">
-        <p14:creationId xmlns:p14="http://schemas.microsoft.com/office/powerpoint/2010/main" val="2527215279"/>
-      </p:ext>
-    </p:extLst>
-  </p:cSld>
-  <p:clrMapOvr>
-    <a:masterClrMapping/>
-  </p:clrMapOvr>
-</p:sld>
-</file>
-
-<file path=ppt/slides/slide2.xml><?xml version="1.0" encoding="utf-8"?>
-<p:sld xmlns:a="http://schemas.openxmlformats.org/drawingml/2006/main" xmlns:r="http://schemas.openxmlformats.org/officeDocument/2006/relationships" xmlns:p="http://schemas.openxmlformats.org/presentationml/2006/main">
-  <p:cSld>
-    <p:spTree>
-      <p:nvGrpSpPr>
-        <p:cNvPr id="1" name=""/>
-        <p:cNvGrpSpPr/>
-        <p:nvPr/>
-      </p:nvGrpSpPr>
-      <p:grpSpPr>
-        <a:xfrm>
-          <a:off x="0" y="0"/>
-          <a:ext cx="0" cy="0"/>
-          <a:chOff x="0" y="0"/>
-          <a:chExt cx="0" cy="0"/>
-        </a:xfrm>
-      </p:grpSpPr>
-      <p:sp>
-        <p:nvSpPr>
-          <p:cNvPr id="2" name="Titel 1">
-            <a:extLst>
-              <a:ext uri="{FF2B5EF4-FFF2-40B4-BE49-F238E27FC236}">
-                <a16:creationId xmlns:a16="http://schemas.microsoft.com/office/drawing/2014/main" id="{BBC467E5-39E6-9E7F-1C58-661632973934}"/>
-              </a:ext>
-            </a:extLst>
-          </p:cNvPr>
-          <p:cNvSpPr>
-            <a:spLocks noGrp="1"/>
-          </p:cNvSpPr>
-          <p:nvPr>
-            <p:ph type="title"/>
-          </p:nvPr>
-        </p:nvSpPr>
-        <p:spPr/>
-        <p:txBody>
-          <a:bodyPr/>
-          <a:lstStyle/>
-          <a:p>
-            <a:r>
-              <a:rPr lang="nl-NL" dirty="0"/>
-              <a:t>Programma</a:t>
-            </a:r>
-          </a:p>
-        </p:txBody>
-      </p:sp>
-      <p:sp>
-        <p:nvSpPr>
-          <p:cNvPr id="3" name="Tijdelijke aanduiding voor inhoud 2">
-            <a:extLst>
-              <a:ext uri="{FF2B5EF4-FFF2-40B4-BE49-F238E27FC236}">
-                <a16:creationId xmlns:a16="http://schemas.microsoft.com/office/drawing/2014/main" id="{DE110306-4AAB-9607-E18E-ACBAC34BDE30}"/>
-              </a:ext>
-            </a:extLst>
-          </p:cNvPr>
-          <p:cNvSpPr>
-            <a:spLocks noGrp="1"/>
-          </p:cNvSpPr>
-          <p:nvPr>
-            <p:ph idx="1"/>
-          </p:nvPr>
-        </p:nvSpPr>
-        <p:spPr/>
-        <p:txBody>
-          <a:bodyPr/>
-          <a:lstStyle/>
-          <a:p>
-            <a:r>
-              <a:rPr lang="nl-NL" dirty="0"/>
-              <a:t>Terugblik vorige les</a:t>
-            </a:r>
-          </a:p>
-          <a:p>
-            <a:r>
-              <a:rPr lang="nl-NL" dirty="0"/>
-              <a:t>Leerdoelen</a:t>
-            </a:r>
-          </a:p>
-          <a:p>
-            <a:r>
-              <a:rPr lang="nl-NL" dirty="0"/>
-              <a:t>Netwerken</a:t>
-            </a:r>
-          </a:p>
-          <a:p>
-            <a:r>
-              <a:rPr lang="nl-NL" dirty="0"/>
-              <a:t>Man in </a:t>
-            </a:r>
-            <a:r>
-              <a:rPr lang="nl-NL" dirty="0" err="1"/>
-              <a:t>the</a:t>
-            </a:r>
-            <a:r>
-              <a:rPr lang="nl-NL" dirty="0"/>
-              <a:t> </a:t>
-            </a:r>
-            <a:r>
-              <a:rPr lang="nl-NL" dirty="0" err="1"/>
-              <a:t>middle</a:t>
-            </a:r>
-            <a:endParaRPr lang="nl-NL" dirty="0"/>
-          </a:p>
-          <a:p>
-            <a:r>
-              <a:rPr lang="nl-NL" dirty="0"/>
-              <a:t>Netwerk beveiliging</a:t>
-            </a:r>
-          </a:p>
-          <a:p>
-            <a:r>
-              <a:rPr lang="nl-NL" dirty="0" err="1"/>
-              <a:t>Wireshark</a:t>
-            </a:r>
-            <a:r>
-              <a:rPr lang="nl-NL" dirty="0"/>
-              <a:t> en netwerkverkeer</a:t>
-            </a:r>
-          </a:p>
-          <a:p>
-            <a:r>
-              <a:rPr lang="nl-NL" dirty="0"/>
-              <a:t>Volgende week</a:t>
-            </a:r>
-          </a:p>
-        </p:txBody>
-      </p:sp>
-    </p:spTree>
-    <p:extLst>
-      <p:ext uri="{BB962C8B-B14F-4D97-AF65-F5344CB8AC3E}">
-        <p14:creationId xmlns:p14="http://schemas.microsoft.com/office/powerpoint/2010/main" val="3969768279"/>
-      </p:ext>
-    </p:extLst>
-  </p:cSld>
-  <p:clrMapOvr>
-    <a:masterClrMapping/>
-  </p:clrMapOvr>
-</p:sld>
-</file>
-
-<file path=ppt/slides/slide3.xml><?xml version="1.0" encoding="utf-8"?>
-<p:sld xmlns:a="http://schemas.openxmlformats.org/drawingml/2006/main" xmlns:r="http://schemas.openxmlformats.org/officeDocument/2006/relationships" xmlns:p="http://schemas.openxmlformats.org/presentationml/2006/main">
-  <p:cSld>
-    <p:spTree>
-      <p:nvGrpSpPr>
-        <p:cNvPr id="1" name=""/>
-        <p:cNvGrpSpPr/>
-        <p:nvPr/>
-      </p:nvGrpSpPr>
-      <p:grpSpPr>
-        <a:xfrm>
-          <a:off x="0" y="0"/>
-          <a:ext cx="0" cy="0"/>
-          <a:chOff x="0" y="0"/>
-          <a:chExt cx="0" cy="0"/>
-        </a:xfrm>
-      </p:grpSpPr>
-      <p:sp>
-        <p:nvSpPr>
-          <p:cNvPr id="2" name="Titel 1">
-            <a:extLst>
-              <a:ext uri="{FF2B5EF4-FFF2-40B4-BE49-F238E27FC236}">
-                <a16:creationId xmlns:a16="http://schemas.microsoft.com/office/drawing/2014/main" id="{5638AEF2-B1E0-DC5C-29EF-6DC8FC82EB69}"/>
-              </a:ext>
-            </a:extLst>
-          </p:cNvPr>
-          <p:cNvSpPr>
-            <a:spLocks noGrp="1"/>
-          </p:cNvSpPr>
-          <p:nvPr>
-            <p:ph type="title"/>
-          </p:nvPr>
-        </p:nvSpPr>
-        <p:spPr/>
-        <p:txBody>
-          <a:bodyPr/>
-          <a:lstStyle/>
-          <a:p>
-            <a:r>
-              <a:rPr lang="nl-NL" dirty="0"/>
-              <a:t>Wat weten we nog van vorige les?</a:t>
-            </a:r>
-          </a:p>
-        </p:txBody>
-      </p:sp>
-      <p:sp>
-        <p:nvSpPr>
-          <p:cNvPr id="3" name="Tijdelijke aanduiding voor inhoud 2">
-            <a:extLst>
-              <a:ext uri="{FF2B5EF4-FFF2-40B4-BE49-F238E27FC236}">
-                <a16:creationId xmlns:a16="http://schemas.microsoft.com/office/drawing/2014/main" id="{FC3088DE-78F2-873D-A6F7-351239A77C18}"/>
-              </a:ext>
-            </a:extLst>
-          </p:cNvPr>
-          <p:cNvSpPr>
-            <a:spLocks noGrp="1"/>
-          </p:cNvSpPr>
-          <p:nvPr>
-            <p:ph idx="1"/>
-          </p:nvPr>
-        </p:nvSpPr>
-        <p:spPr/>
-        <p:txBody>
-          <a:bodyPr/>
-          <a:lstStyle/>
-          <a:p>
-            <a:endParaRPr lang="nl-NL"/>
-          </a:p>
-        </p:txBody>
-      </p:sp>
-    </p:spTree>
-    <p:extLst>
-      <p:ext uri="{BB962C8B-B14F-4D97-AF65-F5344CB8AC3E}">
-        <p14:creationId xmlns:p14="http://schemas.microsoft.com/office/powerpoint/2010/main" val="2781021689"/>
-      </p:ext>
-    </p:extLst>
-  </p:cSld>
-  <p:clrMapOvr>
-    <a:masterClrMapping/>
-  </p:clrMapOvr>
-</p:sld>
-</file>
-
-<file path=ppt/slides/slide4.xml><?xml version="1.0" encoding="utf-8"?>
-<p:sld xmlns:a="http://schemas.openxmlformats.org/drawingml/2006/main" xmlns:r="http://schemas.openxmlformats.org/officeDocument/2006/relationships" xmlns:p="http://schemas.openxmlformats.org/presentationml/2006/main">
-  <p:cSld>
-    <p:spTree>
-      <p:nvGrpSpPr>
-        <p:cNvPr id="1" name=""/>
-        <p:cNvGrpSpPr/>
-        <p:nvPr/>
-      </p:nvGrpSpPr>
-      <p:grpSpPr>
-        <a:xfrm>
-          <a:off x="0" y="0"/>
-          <a:ext cx="0" cy="0"/>
-          <a:chOff x="0" y="0"/>
-          <a:chExt cx="0" cy="0"/>
-        </a:xfrm>
-      </p:grpSpPr>
-      <p:sp>
-        <p:nvSpPr>
-          <p:cNvPr id="2" name="Titel 1">
-            <a:extLst>
-              <a:ext uri="{FF2B5EF4-FFF2-40B4-BE49-F238E27FC236}">
-                <a16:creationId xmlns:a16="http://schemas.microsoft.com/office/drawing/2014/main" id="{8D05855A-447C-1837-7276-355F822E933B}"/>
-              </a:ext>
-            </a:extLst>
-          </p:cNvPr>
-          <p:cNvSpPr>
-            <a:spLocks noGrp="1"/>
-          </p:cNvSpPr>
-          <p:nvPr>
-            <p:ph type="title"/>
-          </p:nvPr>
-        </p:nvSpPr>
-        <p:spPr/>
-        <p:txBody>
-          <a:bodyPr/>
-          <a:lstStyle/>
-          <a:p>
-            <a:r>
-              <a:rPr lang="nl-NL" dirty="0"/>
-              <a:t>Leerdoelen</a:t>
-            </a:r>
-          </a:p>
-        </p:txBody>
-      </p:sp>
-      <p:sp>
-        <p:nvSpPr>
-          <p:cNvPr id="3" name="Tijdelijke aanduiding voor inhoud 2">
-            <a:extLst>
-              <a:ext uri="{FF2B5EF4-FFF2-40B4-BE49-F238E27FC236}">
-                <a16:creationId xmlns:a16="http://schemas.microsoft.com/office/drawing/2014/main" id="{D9C96C40-E495-1DDD-8C30-9641A0EAEC2A}"/>
-              </a:ext>
-            </a:extLst>
-          </p:cNvPr>
-          <p:cNvSpPr>
-            <a:spLocks noGrp="1"/>
-          </p:cNvSpPr>
-          <p:nvPr>
-            <p:ph idx="1"/>
-          </p:nvPr>
-        </p:nvSpPr>
-        <p:spPr/>
-        <p:txBody>
-          <a:bodyPr/>
-          <a:lstStyle/>
-          <a:p>
-            <a:r>
-              <a:rPr lang="nl-NL" dirty="0"/>
-              <a:t>Aan het einde van de les:</a:t>
-            </a:r>
-          </a:p>
-          <a:p>
-            <a:pPr lvl="1"/>
-            <a:r>
-              <a:rPr lang="nl-NL" dirty="0"/>
-              <a:t>Weet je de basis structuur van een netwerk</a:t>
-            </a:r>
-          </a:p>
-          <a:p>
-            <a:pPr lvl="1"/>
-            <a:r>
-              <a:rPr lang="nl-NL" dirty="0"/>
-              <a:t>Weet je wat voor soort berichten over een netwerk gaan</a:t>
-            </a:r>
-          </a:p>
-          <a:p>
-            <a:pPr lvl="1"/>
-            <a:r>
-              <a:rPr lang="nl-NL" dirty="0"/>
-              <a:t>Weet je hoe een man in de </a:t>
-            </a:r>
-            <a:r>
-              <a:rPr lang="nl-NL" dirty="0" err="1"/>
-              <a:t>middle</a:t>
-            </a:r>
-            <a:r>
-              <a:rPr lang="nl-NL" dirty="0"/>
-              <a:t> werkt</a:t>
-            </a:r>
-          </a:p>
-          <a:p>
-            <a:pPr lvl="1"/>
-            <a:r>
-              <a:rPr lang="nl-NL" dirty="0"/>
-              <a:t>Weet je wat te doen om een man in de </a:t>
-            </a:r>
-            <a:r>
-              <a:rPr lang="nl-NL" dirty="0" err="1"/>
-              <a:t>middle</a:t>
-            </a:r>
-            <a:r>
-              <a:rPr lang="nl-NL" dirty="0"/>
-              <a:t> tegen te gaan</a:t>
-            </a:r>
-          </a:p>
-          <a:p>
-            <a:pPr lvl="1"/>
-            <a:r>
-              <a:rPr lang="nl-NL" dirty="0"/>
-              <a:t>Weet je wat je kan doen om een netwerk gepast te beveiligen</a:t>
-            </a:r>
-          </a:p>
-          <a:p>
-            <a:pPr lvl="1"/>
-            <a:r>
-              <a:rPr lang="nl-NL" dirty="0"/>
-              <a:t>Kan je een Netwerk monitoren en berichten filteren</a:t>
-            </a:r>
-          </a:p>
-        </p:txBody>
-      </p:sp>
-    </p:spTree>
-    <p:extLst>
-      <p:ext uri="{BB962C8B-B14F-4D97-AF65-F5344CB8AC3E}">
-        <p14:creationId xmlns:p14="http://schemas.microsoft.com/office/powerpoint/2010/main" val="2616526800"/>
-      </p:ext>
-    </p:extLst>
-  </p:cSld>
-  <p:clrMapOvr>
-    <a:masterClrMapping/>
-  </p:clrMapOvr>
-</p:sld>
-</file>
-
-<file path=ppt/slides/slide5.xml><?xml version="1.0" encoding="utf-8"?>
-<p:sld xmlns:a="http://schemas.openxmlformats.org/drawingml/2006/main" xmlns:r="http://schemas.openxmlformats.org/officeDocument/2006/relationships" xmlns:p="http://schemas.openxmlformats.org/presentationml/2006/main">
-  <p:cSld>
-    <p:spTree>
-      <p:nvGrpSpPr>
-        <p:cNvPr id="1" name=""/>
-        <p:cNvGrpSpPr/>
-        <p:nvPr/>
-      </p:nvGrpSpPr>
-      <p:grpSpPr>
-        <a:xfrm>
-          <a:off x="0" y="0"/>
-          <a:ext cx="0" cy="0"/>
-          <a:chOff x="0" y="0"/>
-          <a:chExt cx="0" cy="0"/>
-        </a:xfrm>
-      </p:grpSpPr>
-      <p:sp>
-        <p:nvSpPr>
-          <p:cNvPr id="2" name="Titel 1">
-            <a:extLst>
-              <a:ext uri="{FF2B5EF4-FFF2-40B4-BE49-F238E27FC236}">
-                <a16:creationId xmlns:a16="http://schemas.microsoft.com/office/drawing/2014/main" id="{620CD66F-CF73-FEB2-B219-E7F12F8AD8B5}"/>
-              </a:ext>
-            </a:extLst>
-          </p:cNvPr>
-          <p:cNvSpPr>
-            <a:spLocks noGrp="1"/>
-          </p:cNvSpPr>
-          <p:nvPr>
-            <p:ph type="title"/>
-          </p:nvPr>
-        </p:nvSpPr>
-        <p:spPr>
-          <a:xfrm>
-            <a:off x="838200" y="365125"/>
-            <a:ext cx="10515600" cy="1325563"/>
-          </a:xfrm>
-        </p:spPr>
-        <p:txBody>
-          <a:bodyPr anchor="ctr">
-            <a:normAutofit/>
-          </a:bodyPr>
-          <a:lstStyle/>
-          <a:p>
-            <a:r>
-              <a:rPr lang="nl-NL" dirty="0"/>
-              <a:t>Netwerken</a:t>
-            </a:r>
-          </a:p>
-        </p:txBody>
-      </p:sp>
-      <p:pic>
-        <p:nvPicPr>
-          <p:cNvPr id="5" name="Graphic 4" descr="Netwerk met effen opvulling">
-            <a:extLst>
-              <a:ext uri="{FF2B5EF4-FFF2-40B4-BE49-F238E27FC236}">
-                <a16:creationId xmlns:a16="http://schemas.microsoft.com/office/drawing/2014/main" id="{D2DA0BF0-5957-EBB2-5B1B-FDB47B929B9B}"/>
-              </a:ext>
-            </a:extLst>
-          </p:cNvPr>
-          <p:cNvPicPr>
-            <a:picLocks noChangeAspect="1"/>
-          </p:cNvPicPr>
-          <p:nvPr/>
-        </p:nvPicPr>
-        <p:blipFill>
-          <a:blip r:embed="rId2">
-            <a:extLst>
-              <a:ext uri="{96DAC541-7B7A-43D3-8B79-37D633B846F1}">
-                <asvg:svgBlip xmlns:asvg="http://schemas.microsoft.com/office/drawing/2016/SVG/main" r:embed="rId3"/>
-              </a:ext>
-            </a:extLst>
-          </a:blip>
-          <a:stretch>
-            <a:fillRect/>
-          </a:stretch>
-        </p:blipFill>
-        <p:spPr>
-          <a:xfrm>
-            <a:off x="1419708" y="1825625"/>
-            <a:ext cx="4018584" cy="4018584"/>
-          </a:xfrm>
-          <a:prstGeom prst="rect">
-            <a:avLst/>
-          </a:prstGeom>
-        </p:spPr>
-      </p:pic>
-      <p:sp>
-        <p:nvSpPr>
-          <p:cNvPr id="3" name="Tijdelijke aanduiding voor inhoud 2">
-            <a:extLst>
-              <a:ext uri="{FF2B5EF4-FFF2-40B4-BE49-F238E27FC236}">
-                <a16:creationId xmlns:a16="http://schemas.microsoft.com/office/drawing/2014/main" id="{189B7252-C2BB-B3F6-C40F-DA15C2ADD920}"/>
-              </a:ext>
-            </a:extLst>
-          </p:cNvPr>
-          <p:cNvSpPr>
-            <a:spLocks noGrp="1"/>
-          </p:cNvSpPr>
-          <p:nvPr>
-            <p:ph sz="half" idx="2"/>
-          </p:nvPr>
-        </p:nvSpPr>
-        <p:spPr>
-          <a:xfrm>
-            <a:off x="6172200" y="1825625"/>
-            <a:ext cx="5181600" cy="4018584"/>
-          </a:xfrm>
-        </p:spPr>
-        <p:txBody>
-          <a:bodyPr>
-            <a:normAutofit/>
-          </a:bodyPr>
-          <a:lstStyle/>
-          <a:p>
-            <a:r>
-              <a:rPr lang="nl-NL" dirty="0"/>
-              <a:t>Een connectie tussen twee of meer computerende apparaten</a:t>
-            </a:r>
-          </a:p>
-          <a:p>
-            <a:r>
-              <a:rPr lang="nl-NL" dirty="0"/>
-              <a:t>3 kern-types van netwerken</a:t>
-            </a:r>
-          </a:p>
-          <a:p>
-            <a:pPr lvl="1"/>
-            <a:r>
-              <a:rPr lang="nl-NL" sz="2800"/>
-              <a:t>Direct pc-pc (Komt bijna niet meer voor)</a:t>
-            </a:r>
-          </a:p>
-          <a:p>
-            <a:pPr lvl="1"/>
-            <a:r>
-              <a:rPr lang="nl-NL" sz="2800"/>
-              <a:t>Kabelnetwerk (Ethernet, USB-C)</a:t>
-            </a:r>
-          </a:p>
-          <a:p>
-            <a:pPr lvl="1"/>
-            <a:r>
-              <a:rPr lang="nl-NL" sz="2800"/>
-              <a:t>Draadloos (Wifi, 5G)</a:t>
-            </a:r>
-          </a:p>
-          <a:p>
-            <a:endParaRPr lang="nl-NL" dirty="0"/>
-          </a:p>
-        </p:txBody>
-      </p:sp>
-    </p:spTree>
-    <p:extLst>
-      <p:ext uri="{BB962C8B-B14F-4D97-AF65-F5344CB8AC3E}">
-        <p14:creationId xmlns:p14="http://schemas.microsoft.com/office/powerpoint/2010/main" val="3061633083"/>
-      </p:ext>
-    </p:extLst>
-  </p:cSld>
-  <p:clrMapOvr>
-    <a:masterClrMapping/>
-  </p:clrMapOvr>
-</p:sld>
-</file>
-
-<file path=ppt/slides/slide6.xml><?xml version="1.0" encoding="utf-8"?>
-<p:sld xmlns:a="http://schemas.openxmlformats.org/drawingml/2006/main" xmlns:r="http://schemas.openxmlformats.org/officeDocument/2006/relationships" xmlns:p="http://schemas.openxmlformats.org/presentationml/2006/main">
-  <p:cSld>
-    <p:spTree>
-      <p:nvGrpSpPr>
-        <p:cNvPr id="1" name=""/>
-        <p:cNvGrpSpPr/>
-        <p:nvPr/>
-      </p:nvGrpSpPr>
-      <p:grpSpPr>
-        <a:xfrm>
-          <a:off x="0" y="0"/>
-          <a:ext cx="0" cy="0"/>
-          <a:chOff x="0" y="0"/>
-          <a:chExt cx="0" cy="0"/>
-        </a:xfrm>
-      </p:grpSpPr>
-      <p:sp>
-        <p:nvSpPr>
-          <p:cNvPr id="2" name="Titel 1">
-            <a:extLst>
-              <a:ext uri="{FF2B5EF4-FFF2-40B4-BE49-F238E27FC236}">
-                <a16:creationId xmlns:a16="http://schemas.microsoft.com/office/drawing/2014/main" id="{30C81737-8944-0A78-FE04-49DC4DA6435E}"/>
-              </a:ext>
-            </a:extLst>
-          </p:cNvPr>
-          <p:cNvSpPr>
-            <a:spLocks noGrp="1"/>
-          </p:cNvSpPr>
-          <p:nvPr>
-            <p:ph type="title"/>
-          </p:nvPr>
-        </p:nvSpPr>
-        <p:spPr/>
-        <p:txBody>
-          <a:bodyPr/>
-          <a:lstStyle/>
-          <a:p>
-            <a:r>
-              <a:rPr lang="nl-NL" dirty="0"/>
-              <a:t>Werkvorm - Netwerken</a:t>
-            </a:r>
-          </a:p>
-        </p:txBody>
-      </p:sp>
-      <p:sp>
-        <p:nvSpPr>
-          <p:cNvPr id="3" name="Tijdelijke aanduiding voor inhoud 2">
-            <a:extLst>
-              <a:ext uri="{FF2B5EF4-FFF2-40B4-BE49-F238E27FC236}">
-                <a16:creationId xmlns:a16="http://schemas.microsoft.com/office/drawing/2014/main" id="{8F4F2452-C492-8917-2ACC-54517833AD0C}"/>
-              </a:ext>
-            </a:extLst>
-          </p:cNvPr>
-          <p:cNvSpPr>
-            <a:spLocks noGrp="1"/>
-          </p:cNvSpPr>
-          <p:nvPr>
-            <p:ph idx="1"/>
-          </p:nvPr>
-        </p:nvSpPr>
-        <p:spPr/>
-        <p:txBody>
-          <a:bodyPr>
-            <a:normAutofit/>
-          </a:bodyPr>
-          <a:lstStyle/>
-          <a:p>
-            <a:r>
-              <a:rPr lang="nl-NL" dirty="0"/>
-              <a:t>2 paren kiezen een wachtwoord voor ieder paar uit de opties</a:t>
-            </a:r>
-          </a:p>
-          <a:p>
-            <a:r>
-              <a:rPr lang="nl-NL" dirty="0"/>
-              <a:t>1 persoon is de netwerk runner.</a:t>
-            </a:r>
-          </a:p>
-          <a:p>
-            <a:r>
-              <a:rPr lang="nl-NL" dirty="0"/>
-              <a:t>De twee paren staan op overstaande zijdes van het lokaal met de ruggen naar elkaar toe.</a:t>
-            </a:r>
-          </a:p>
-          <a:p>
-            <a:r>
-              <a:rPr lang="nl-NL" dirty="0"/>
-              <a:t>De verzoeker stuurt berichten met hun wachtwoord</a:t>
-            </a:r>
-          </a:p>
-          <a:p>
-            <a:r>
-              <a:rPr lang="nl-NL" dirty="0"/>
-              <a:t>De ontvanger geeft het correcte bericht terug naar de verzoeker</a:t>
-            </a:r>
-          </a:p>
-          <a:p>
-            <a:r>
-              <a:rPr lang="nl-NL" dirty="0"/>
-              <a:t>Communicatie is blind en via de netwerk runner.</a:t>
-            </a:r>
-          </a:p>
-        </p:txBody>
-      </p:sp>
-    </p:spTree>
-    <p:extLst>
-      <p:ext uri="{BB962C8B-B14F-4D97-AF65-F5344CB8AC3E}">
-        <p14:creationId xmlns:p14="http://schemas.microsoft.com/office/powerpoint/2010/main" val="4094207423"/>
-      </p:ext>
-    </p:extLst>
-  </p:cSld>
-  <p:clrMapOvr>
-    <a:masterClrMapping/>
-  </p:clrMapOvr>
-</p:sld>
-</file>
-
-<file path=ppt/slides/slide7.xml><?xml version="1.0" encoding="utf-8"?>
-<p:sld xmlns:a="http://schemas.openxmlformats.org/drawingml/2006/main" xmlns:r="http://schemas.openxmlformats.org/officeDocument/2006/relationships" xmlns:p="http://schemas.openxmlformats.org/presentationml/2006/main">
-  <p:cSld>
-    <p:spTree>
-      <p:nvGrpSpPr>
-        <p:cNvPr id="1" name="">
-          <a:extLst>
-            <a:ext uri="{FF2B5EF4-FFF2-40B4-BE49-F238E27FC236}">
-              <a16:creationId xmlns:a16="http://schemas.microsoft.com/office/drawing/2014/main" id="{31ED9FCC-7831-D105-403F-A8314BB0861B}"/>
-            </a:ext>
-          </a:extLst>
-        </p:cNvPr>
-        <p:cNvGrpSpPr/>
-        <p:nvPr/>
-      </p:nvGrpSpPr>
-      <p:grpSpPr>
-        <a:xfrm>
-          <a:off x="0" y="0"/>
-          <a:ext cx="0" cy="0"/>
-          <a:chOff x="0" y="0"/>
-          <a:chExt cx="0" cy="0"/>
-        </a:xfrm>
-      </p:grpSpPr>
-      <p:sp>
-        <p:nvSpPr>
-          <p:cNvPr id="2" name="Titel 1">
-            <a:extLst>
-              <a:ext uri="{FF2B5EF4-FFF2-40B4-BE49-F238E27FC236}">
-                <a16:creationId xmlns:a16="http://schemas.microsoft.com/office/drawing/2014/main" id="{7E4C9877-E549-5D69-27BA-0A5EA4AD62C1}"/>
-              </a:ext>
-            </a:extLst>
-          </p:cNvPr>
-          <p:cNvSpPr>
-            <a:spLocks noGrp="1"/>
-          </p:cNvSpPr>
-          <p:nvPr>
-            <p:ph type="title"/>
-          </p:nvPr>
-        </p:nvSpPr>
-        <p:spPr/>
-        <p:txBody>
-          <a:bodyPr/>
-          <a:lstStyle/>
-          <a:p>
-            <a:r>
-              <a:rPr lang="nl-NL"/>
-              <a:t>Netwerk aanvallen</a:t>
-            </a:r>
-          </a:p>
-        </p:txBody>
-      </p:sp>
-      <p:sp>
-        <p:nvSpPr>
-          <p:cNvPr id="3" name="Tijdelijke aanduiding voor inhoud 2">
-            <a:extLst>
-              <a:ext uri="{FF2B5EF4-FFF2-40B4-BE49-F238E27FC236}">
-                <a16:creationId xmlns:a16="http://schemas.microsoft.com/office/drawing/2014/main" id="{51BCE78C-2EB1-CD07-E8E9-3BA9D9AE7939}"/>
-              </a:ext>
-            </a:extLst>
-          </p:cNvPr>
-          <p:cNvSpPr>
-            <a:spLocks noGrp="1"/>
-          </p:cNvSpPr>
-          <p:nvPr>
-            <p:ph idx="1"/>
-          </p:nvPr>
-        </p:nvSpPr>
-        <p:spPr/>
-        <p:txBody>
-          <a:bodyPr>
-            <a:normAutofit fontScale="85000" lnSpcReduction="20000"/>
-          </a:bodyPr>
-          <a:lstStyle/>
-          <a:p>
-            <a:r>
-              <a:rPr lang="nl-NL" dirty="0"/>
-              <a:t>Blokkade/</a:t>
-            </a:r>
-            <a:r>
-              <a:rPr lang="nl-NL" dirty="0" err="1"/>
-              <a:t>wijgering</a:t>
-            </a:r>
-            <a:r>
-              <a:rPr lang="nl-NL" dirty="0"/>
-              <a:t> aanvallen</a:t>
-            </a:r>
-          </a:p>
-          <a:p>
-            <a:pPr lvl="1"/>
-            <a:r>
-              <a:rPr lang="nl-NL" dirty="0"/>
-              <a:t>DDOS – Distributed </a:t>
-            </a:r>
-            <a:r>
-              <a:rPr lang="nl-NL" dirty="0" err="1"/>
-              <a:t>denial</a:t>
-            </a:r>
-            <a:r>
-              <a:rPr lang="nl-NL" dirty="0"/>
-              <a:t> of services</a:t>
-            </a:r>
-          </a:p>
-          <a:p>
-            <a:pPr lvl="2"/>
-            <a:r>
-              <a:rPr lang="nl-NL" dirty="0"/>
-              <a:t>Het platleggen van een systeem door het netwerk te bombarderen met verzoeken van vele plaatsen</a:t>
-            </a:r>
-          </a:p>
-          <a:p>
-            <a:pPr lvl="1"/>
-            <a:r>
-              <a:rPr lang="nl-NL" dirty="0"/>
-              <a:t>Volume bezetting/sturing</a:t>
-            </a:r>
-          </a:p>
-          <a:p>
-            <a:pPr lvl="2"/>
-            <a:r>
-              <a:rPr lang="nl-NL" dirty="0"/>
-              <a:t>Een netwerk bezet houden waardoor werkelijke berichten niet erdoorheen komen</a:t>
-            </a:r>
-          </a:p>
-          <a:p>
-            <a:pPr lvl="1"/>
-            <a:r>
-              <a:rPr lang="nl-NL" dirty="0"/>
-              <a:t>Malafide geformatteerde pakketten aanvallen</a:t>
-            </a:r>
-          </a:p>
-          <a:p>
-            <a:pPr lvl="2"/>
-            <a:r>
-              <a:rPr lang="nl-NL" dirty="0"/>
-              <a:t>Een invoer die de server/service der mate verlangzaamd dat deze niet goed meer kan functioneren</a:t>
-            </a:r>
-          </a:p>
-          <a:p>
-            <a:r>
-              <a:rPr lang="nl-NL" dirty="0"/>
-              <a:t>Toegang aanvallen</a:t>
-            </a:r>
-          </a:p>
-          <a:p>
-            <a:pPr lvl="1"/>
-            <a:r>
-              <a:rPr lang="nl-NL" dirty="0"/>
-              <a:t>IP </a:t>
-            </a:r>
-            <a:r>
-              <a:rPr lang="nl-NL" dirty="0" err="1"/>
-              <a:t>spoofing</a:t>
-            </a:r>
-            <a:endParaRPr lang="nl-NL" dirty="0"/>
-          </a:p>
-          <a:p>
-            <a:pPr lvl="2"/>
-            <a:r>
-              <a:rPr lang="nl-NL" dirty="0"/>
-              <a:t>Maskeer je IP adres om te doen alsof je al op een netwerk zit of hoort om toegang te krijgen.</a:t>
-            </a:r>
-          </a:p>
-          <a:p>
-            <a:pPr lvl="1"/>
-            <a:r>
-              <a:rPr lang="nl-NL" dirty="0"/>
-              <a:t>Man in </a:t>
-            </a:r>
-            <a:r>
-              <a:rPr lang="nl-NL" dirty="0" err="1"/>
-              <a:t>the</a:t>
-            </a:r>
-            <a:r>
-              <a:rPr lang="nl-NL" dirty="0"/>
-              <a:t> </a:t>
-            </a:r>
-            <a:r>
-              <a:rPr lang="nl-NL" dirty="0" err="1"/>
-              <a:t>middle</a:t>
-            </a:r>
-            <a:r>
-              <a:rPr lang="nl-NL" dirty="0"/>
-              <a:t>/ </a:t>
-            </a:r>
-            <a:r>
-              <a:rPr lang="nl-NL" dirty="0" err="1"/>
-              <a:t>packet</a:t>
-            </a:r>
-            <a:r>
-              <a:rPr lang="nl-NL" dirty="0"/>
-              <a:t> </a:t>
-            </a:r>
-            <a:r>
-              <a:rPr lang="nl-NL" dirty="0" err="1"/>
-              <a:t>sniffing</a:t>
-            </a:r>
-            <a:endParaRPr lang="nl-NL" dirty="0"/>
-          </a:p>
-          <a:p>
-            <a:pPr lvl="2"/>
-            <a:r>
-              <a:rPr lang="nl-NL" dirty="0"/>
-              <a:t>Netwerken afluisteren om data te krijgen of om cruciale gegevens te vinden om meer toegang te krijgen.</a:t>
-            </a:r>
-          </a:p>
-        </p:txBody>
-      </p:sp>
-      <p:pic>
-        <p:nvPicPr>
-          <p:cNvPr id="5" name="Graphic 4" descr="Bakstenen muur met effen opvulling">
-            <a:extLst>
-              <a:ext uri="{FF2B5EF4-FFF2-40B4-BE49-F238E27FC236}">
-                <a16:creationId xmlns:a16="http://schemas.microsoft.com/office/drawing/2014/main" id="{1A534065-879A-3BA4-B7D5-DF39963B0FF4}"/>
-              </a:ext>
-            </a:extLst>
-          </p:cNvPr>
-          <p:cNvPicPr>
-            <a:picLocks noChangeAspect="1"/>
-          </p:cNvPicPr>
-          <p:nvPr/>
-        </p:nvPicPr>
-        <p:blipFill>
-          <a:blip r:embed="rId2">
-            <a:extLst>
-              <a:ext uri="{96DAC541-7B7A-43D3-8B79-37D633B846F1}">
-                <asvg:svgBlip xmlns:asvg="http://schemas.microsoft.com/office/drawing/2016/SVG/main" r:embed="rId3"/>
-              </a:ext>
-            </a:extLst>
-          </a:blip>
-          <a:stretch>
-            <a:fillRect/>
-          </a:stretch>
-        </p:blipFill>
-        <p:spPr>
-          <a:xfrm>
-            <a:off x="9713626" y="425415"/>
-            <a:ext cx="2026170" cy="2026170"/>
-          </a:xfrm>
-          <a:prstGeom prst="rect">
-            <a:avLst/>
-          </a:prstGeom>
-        </p:spPr>
-      </p:pic>
-      <p:pic>
-        <p:nvPicPr>
-          <p:cNvPr id="7" name="Graphic 6" descr="Klep open met effen opvulling">
-            <a:extLst>
-              <a:ext uri="{FF2B5EF4-FFF2-40B4-BE49-F238E27FC236}">
-                <a16:creationId xmlns:a16="http://schemas.microsoft.com/office/drawing/2014/main" id="{394F891C-4958-5F7C-ABBE-99508366C1E7}"/>
-              </a:ext>
-            </a:extLst>
-          </p:cNvPr>
-          <p:cNvPicPr>
-            <a:picLocks noChangeAspect="1"/>
-          </p:cNvPicPr>
-          <p:nvPr/>
-        </p:nvPicPr>
-        <p:blipFill>
-          <a:blip r:embed="rId4">
-            <a:extLst>
-              <a:ext uri="{96DAC541-7B7A-43D3-8B79-37D633B846F1}">
-                <asvg:svgBlip xmlns:asvg="http://schemas.microsoft.com/office/drawing/2016/SVG/main" r:embed="rId5"/>
-              </a:ext>
-            </a:extLst>
-          </a:blip>
-          <a:stretch>
-            <a:fillRect/>
-          </a:stretch>
-        </p:blipFill>
-        <p:spPr>
-          <a:xfrm>
-            <a:off x="11085850" y="4729397"/>
-            <a:ext cx="1307892" cy="1307892"/>
-          </a:xfrm>
-          <a:prstGeom prst="rect">
-            <a:avLst/>
-          </a:prstGeom>
-        </p:spPr>
-      </p:pic>
-    </p:spTree>
-    <p:extLst>
-      <p:ext uri="{BB962C8B-B14F-4D97-AF65-F5344CB8AC3E}">
-        <p14:creationId xmlns:p14="http://schemas.microsoft.com/office/powerpoint/2010/main" val="3502173374"/>
-      </p:ext>
-    </p:extLst>
-  </p:cSld>
-  <p:clrMapOvr>
-    <a:masterClrMapping/>
-  </p:clrMapOvr>
-</p:sld>
-</file>
-
-<file path=ppt/slides/slide8.xml><?xml version="1.0" encoding="utf-8"?>
-<p:sld xmlns:a="http://schemas.openxmlformats.org/drawingml/2006/main" xmlns:r="http://schemas.openxmlformats.org/officeDocument/2006/relationships" xmlns:p="http://schemas.openxmlformats.org/presentationml/2006/main">
-  <p:cSld>
-    <p:spTree>
-      <p:nvGrpSpPr>
-        <p:cNvPr id="1" name=""/>
-        <p:cNvGrpSpPr/>
-        <p:nvPr/>
-      </p:nvGrpSpPr>
-      <p:grpSpPr>
-        <a:xfrm>
-          <a:off x="0" y="0"/>
-          <a:ext cx="0" cy="0"/>
-          <a:chOff x="0" y="0"/>
-          <a:chExt cx="0" cy="0"/>
-        </a:xfrm>
-      </p:grpSpPr>
-      <p:sp>
-        <p:nvSpPr>
-          <p:cNvPr id="2" name="Titel 1">
-            <a:extLst>
-              <a:ext uri="{FF2B5EF4-FFF2-40B4-BE49-F238E27FC236}">
-                <a16:creationId xmlns:a16="http://schemas.microsoft.com/office/drawing/2014/main" id="{F1607051-0F3C-18D1-A04F-F432EA764878}"/>
-              </a:ext>
-            </a:extLst>
-          </p:cNvPr>
-          <p:cNvSpPr>
-            <a:spLocks noGrp="1"/>
-          </p:cNvSpPr>
-          <p:nvPr>
-            <p:ph type="title"/>
-          </p:nvPr>
-        </p:nvSpPr>
-        <p:spPr/>
-        <p:txBody>
-          <a:bodyPr/>
-          <a:lstStyle/>
-          <a:p>
-            <a:r>
-              <a:rPr lang="nl-NL"/>
-              <a:t>Netwerk aanvallen</a:t>
-            </a:r>
-          </a:p>
-        </p:txBody>
-      </p:sp>
-      <p:sp>
-        <p:nvSpPr>
-          <p:cNvPr id="3" name="Tijdelijke aanduiding voor inhoud 2">
-            <a:extLst>
-              <a:ext uri="{FF2B5EF4-FFF2-40B4-BE49-F238E27FC236}">
-                <a16:creationId xmlns:a16="http://schemas.microsoft.com/office/drawing/2014/main" id="{E65DC7E6-20F3-149A-4BB4-6A7FD62524AE}"/>
-              </a:ext>
-            </a:extLst>
-          </p:cNvPr>
-          <p:cNvSpPr>
-            <a:spLocks noGrp="1"/>
-          </p:cNvSpPr>
-          <p:nvPr>
-            <p:ph idx="1"/>
-          </p:nvPr>
-        </p:nvSpPr>
-        <p:spPr/>
-        <p:txBody>
-          <a:bodyPr>
-            <a:normAutofit/>
-          </a:bodyPr>
-          <a:lstStyle/>
-          <a:p>
-            <a:r>
-              <a:rPr lang="nl-NL" dirty="0"/>
-              <a:t>Onderzoekende aanvallen</a:t>
-            </a:r>
-          </a:p>
-          <a:p>
-            <a:pPr lvl="1"/>
-            <a:r>
-              <a:rPr lang="nl-NL" dirty="0"/>
-              <a:t>Ping/port </a:t>
-            </a:r>
-            <a:r>
-              <a:rPr lang="nl-NL" dirty="0" err="1"/>
-              <a:t>sweeping</a:t>
-            </a:r>
-            <a:endParaRPr lang="nl-NL" dirty="0"/>
-          </a:p>
-          <a:p>
-            <a:pPr lvl="2"/>
-            <a:r>
-              <a:rPr lang="nl-NL" dirty="0"/>
-              <a:t>Welke apparaten/ poorten staan open om toegang te verlenen op een netwerk en hoe kan je die benutten om vervolgens verder in het systeem te komen.</a:t>
-            </a:r>
-          </a:p>
-          <a:p>
-            <a:r>
-              <a:rPr lang="nl-NL" dirty="0"/>
-              <a:t>Afluisterende aanvallen</a:t>
-            </a:r>
-          </a:p>
-          <a:p>
-            <a:pPr lvl="1"/>
-            <a:r>
-              <a:rPr lang="nl-NL" dirty="0"/>
-              <a:t>IP </a:t>
-            </a:r>
-            <a:r>
-              <a:rPr lang="nl-NL" dirty="0" err="1"/>
-              <a:t>spoofing</a:t>
-            </a:r>
-            <a:endParaRPr lang="nl-NL" dirty="0"/>
-          </a:p>
-          <a:p>
-            <a:pPr lvl="2"/>
-            <a:r>
-              <a:rPr lang="nl-NL" dirty="0"/>
-              <a:t>Slechte netwerken controleren niet of er een dubbel IP adres actief is op het netwerk. Beide krijgen een kopie van al hun binnenkomende berichten.</a:t>
-            </a:r>
-          </a:p>
-        </p:txBody>
-      </p:sp>
-      <p:pic>
-        <p:nvPicPr>
-          <p:cNvPr id="5" name="Graphic 4" descr="Vergrootglas met effen opvulling">
-            <a:extLst>
-              <a:ext uri="{FF2B5EF4-FFF2-40B4-BE49-F238E27FC236}">
-                <a16:creationId xmlns:a16="http://schemas.microsoft.com/office/drawing/2014/main" id="{AB4A0A85-D6C4-DD81-CD96-9C714D763D62}"/>
-              </a:ext>
-            </a:extLst>
-          </p:cNvPr>
-          <p:cNvPicPr>
-            <a:picLocks noChangeAspect="1"/>
-          </p:cNvPicPr>
-          <p:nvPr/>
-        </p:nvPicPr>
-        <p:blipFill>
-          <a:blip r:embed="rId2">
-            <a:extLst>
-              <a:ext uri="{96DAC541-7B7A-43D3-8B79-37D633B846F1}">
-                <asvg:svgBlip xmlns:asvg="http://schemas.microsoft.com/office/drawing/2016/SVG/main" r:embed="rId3"/>
-              </a:ext>
-            </a:extLst>
-          </a:blip>
-          <a:stretch>
-            <a:fillRect/>
-          </a:stretch>
-        </p:blipFill>
-        <p:spPr>
-          <a:xfrm>
-            <a:off x="6178446" y="365125"/>
-            <a:ext cx="1661410" cy="1661410"/>
-          </a:xfrm>
-          <a:prstGeom prst="rect">
-            <a:avLst/>
-          </a:prstGeom>
-        </p:spPr>
-      </p:pic>
-      <p:pic>
-        <p:nvPicPr>
-          <p:cNvPr id="7" name="Graphic 6" descr="Oor met effen opvulling">
-            <a:extLst>
-              <a:ext uri="{FF2B5EF4-FFF2-40B4-BE49-F238E27FC236}">
-                <a16:creationId xmlns:a16="http://schemas.microsoft.com/office/drawing/2014/main" id="{FB76A6A6-A8B4-26B8-999D-580E994A1FAC}"/>
-              </a:ext>
-            </a:extLst>
-          </p:cNvPr>
-          <p:cNvPicPr>
-            <a:picLocks noChangeAspect="1"/>
-          </p:cNvPicPr>
-          <p:nvPr/>
-        </p:nvPicPr>
-        <p:blipFill>
-          <a:blip r:embed="rId4">
-            <a:extLst>
-              <a:ext uri="{96DAC541-7B7A-43D3-8B79-37D633B846F1}">
-                <asvg:svgBlip xmlns:asvg="http://schemas.microsoft.com/office/drawing/2016/SVG/main" r:embed="rId5"/>
-              </a:ext>
-            </a:extLst>
-          </a:blip>
-          <a:stretch>
-            <a:fillRect/>
-          </a:stretch>
-        </p:blipFill>
-        <p:spPr>
-          <a:xfrm>
-            <a:off x="10338314" y="4507441"/>
-            <a:ext cx="1325563" cy="1325563"/>
-          </a:xfrm>
-          <a:prstGeom prst="rect">
-            <a:avLst/>
-          </a:prstGeom>
-        </p:spPr>
-      </p:pic>
-    </p:spTree>
-    <p:extLst>
-      <p:ext uri="{BB962C8B-B14F-4D97-AF65-F5344CB8AC3E}">
-        <p14:creationId xmlns:p14="http://schemas.microsoft.com/office/powerpoint/2010/main" val="4073276283"/>
-      </p:ext>
-    </p:extLst>
-  </p:cSld>
-  <p:clrMapOvr>
-    <a:masterClrMapping/>
-  </p:clrMapOvr>
-</p:sld>
-</file>
-
 <file path=ppt/slides/slide9.xml><?xml version="1.0" encoding="utf-8"?>
 <p:sld xmlns:a="http://schemas.openxmlformats.org/drawingml/2006/main" xmlns:r="http://schemas.openxmlformats.org/officeDocument/2006/relationships" xmlns:p="http://schemas.openxmlformats.org/presentationml/2006/main">
   <p:cSld>
@@ -7666,7 +7508,7 @@
           <p:cNvPr id="2" name="Titel 1">
             <a:extLst>
               <a:ext uri="{FF2B5EF4-FFF2-40B4-BE49-F238E27FC236}">
-                <a16:creationId xmlns:a16="http://schemas.microsoft.com/office/drawing/2014/main" id="{5DB2699A-2C07-D10A-E265-468613EBC0EF}"/>
+                <a16:creationId xmlns:a16="http://schemas.microsoft.com/office/drawing/2014/main" id="{4B56AA6D-017F-3573-F044-9D2399B0AE2B}"/>
               </a:ext>
             </a:extLst>
           </p:cNvPr>
@@ -7684,7 +7526,7 @@
           <a:p>
             <a:r>
               <a:rPr lang="nl-NL" dirty="0"/>
-              <a:t>Netwerk aanvallen</a:t>
+              <a:t>Bekende netwerk tactieken en voorbeelden</a:t>
             </a:r>
           </a:p>
         </p:txBody>
@@ -7694,7 +7536,7 @@
           <p:cNvPr id="3" name="Tijdelijke aanduiding voor inhoud 2">
             <a:extLst>
               <a:ext uri="{FF2B5EF4-FFF2-40B4-BE49-F238E27FC236}">
-                <a16:creationId xmlns:a16="http://schemas.microsoft.com/office/drawing/2014/main" id="{EBD0633F-36BA-C132-F28C-B688770650BE}"/>
+                <a16:creationId xmlns:a16="http://schemas.microsoft.com/office/drawing/2014/main" id="{AAF5138A-4388-6D78-9143-191146A67141}"/>
               </a:ext>
             </a:extLst>
           </p:cNvPr>
@@ -7712,92 +7554,39 @@
           <a:p>
             <a:r>
               <a:rPr lang="nl-NL" dirty="0"/>
-              <a:t>Brekende/manipulerende aanvallen</a:t>
-            </a:r>
-          </a:p>
-          <a:p>
-            <a:pPr lvl="1"/>
-            <a:r>
-              <a:rPr lang="nl-NL" dirty="0"/>
-              <a:t>Buffer overflow aanvallen</a:t>
-            </a:r>
-          </a:p>
-          <a:p>
-            <a:pPr lvl="2"/>
-            <a:r>
-              <a:rPr lang="nl-NL" dirty="0"/>
-              <a:t>Gebruik maken van server zwaktes om </a:t>
-            </a:r>
-            <a:r>
-              <a:rPr lang="nl-NL" dirty="0" err="1"/>
-              <a:t>errors</a:t>
-            </a:r>
-            <a:r>
-              <a:rPr lang="nl-NL" dirty="0"/>
-              <a:t> herhaaldelijk te </a:t>
-            </a:r>
-            <a:r>
-              <a:rPr lang="nl-NL" dirty="0" err="1"/>
-              <a:t>creeren</a:t>
-            </a:r>
-            <a:r>
-              <a:rPr lang="nl-NL" dirty="0"/>
-              <a:t> om zo het </a:t>
-            </a:r>
-            <a:r>
-              <a:rPr lang="nl-NL" dirty="0" err="1"/>
-              <a:t>systeem’s</a:t>
-            </a:r>
-            <a:r>
-              <a:rPr lang="nl-NL" dirty="0"/>
-              <a:t> geheugen aan te tasten. Dit zorgt ervoor dat er een gat ontstaat in de code en die kan een hacker vullen met eigen code</a:t>
+              <a:t>De “Wifi in de trein” techniek</a:t>
+            </a:r>
+          </a:p>
+          <a:p>
+            <a:r>
+              <a:rPr lang="nl-NL" dirty="0"/>
+              <a:t>De “Koffieshop” techniek</a:t>
+            </a:r>
+          </a:p>
+          <a:p>
+            <a:r>
+              <a:rPr lang="nl-NL" dirty="0"/>
+              <a:t>Het “IT studentenhuis” fiasco</a:t>
             </a:r>
           </a:p>
           <a:p>
             <a:endParaRPr lang="nl-NL" dirty="0"/>
           </a:p>
-        </p:txBody>
-      </p:sp>
-      <p:pic>
-        <p:nvPicPr>
-          <p:cNvPr id="5" name="Graphic 4" descr="Hammer1 met effen opvulling">
-            <a:extLst>
-              <a:ext uri="{FF2B5EF4-FFF2-40B4-BE49-F238E27FC236}">
-                <a16:creationId xmlns:a16="http://schemas.microsoft.com/office/drawing/2014/main" id="{FEC0A9AF-2F0D-F756-C4C5-0C64F205DD76}"/>
-              </a:ext>
-            </a:extLst>
-          </p:cNvPr>
-          <p:cNvPicPr>
-            <a:picLocks noChangeAspect="1"/>
-          </p:cNvPicPr>
-          <p:nvPr/>
-        </p:nvPicPr>
-        <p:blipFill>
-          <a:blip r:embed="rId2">
-            <a:extLst>
-              <a:ext uri="{96DAC541-7B7A-43D3-8B79-37D633B846F1}">
-                <asvg:svgBlip xmlns:asvg="http://schemas.microsoft.com/office/drawing/2016/SVG/main" r:embed="rId3"/>
-              </a:ext>
-            </a:extLst>
-          </a:blip>
-          <a:stretch>
-            <a:fillRect/>
-          </a:stretch>
-        </p:blipFill>
-        <p:spPr>
-          <a:xfrm>
-            <a:off x="10149590" y="4264701"/>
-            <a:ext cx="2042410" cy="2042410"/>
-          </a:xfrm>
-          <a:prstGeom prst="rect">
-            <a:avLst/>
-          </a:prstGeom>
-        </p:spPr>
-      </p:pic>
+          <a:p>
+            <a:endParaRPr lang="nl-NL" dirty="0"/>
+          </a:p>
+          <a:p>
+            <a:r>
+              <a:rPr lang="nl-NL" dirty="0"/>
+              <a:t>Extra: het pride parade schandaal van een groep onderzoekers</a:t>
+            </a:r>
+          </a:p>
+        </p:txBody>
+      </p:sp>
     </p:spTree>
     <p:extLst>
       <p:ext uri="{BB962C8B-B14F-4D97-AF65-F5344CB8AC3E}">
-        <p14:creationId xmlns:p14="http://schemas.microsoft.com/office/powerpoint/2010/main" val="879928884"/>
+        <p14:creationId xmlns:p14="http://schemas.microsoft.com/office/powerpoint/2010/main" val="1177706916"/>
       </p:ext>
     </p:extLst>
   </p:cSld>
